--- a/课件/C1/C1-B-03/C1-B-03.pptx
+++ b/课件/C1/C1-B-03/C1-B-03.pptx
@@ -19,9 +19,10 @@
     <p:sldId id="267" r:id="rId13"/>
     <p:sldId id="268" r:id="rId14"/>
     <p:sldId id="269" r:id="rId15"/>
+    <p:sldId id="270" r:id="rId16"/>
   </p:sldIdLst>
   <p:notesMasterIdLst>
-    <p:notesMasterId r:id="rId16"/>
+    <p:notesMasterId r:id="rId17"/>
   </p:notesMasterIdLst>
   <p:sldSz cx="12191695" cy="6858000"/>
   <p:notesSz cx="6858000" cy="12191695"/>
@@ -979,6 +980,94 @@
             <a:fld id="{F7021451-1387-4CA6-816F-3879F97B5CBC}" type="slidenum">
               <a:rPr lang="en-US"/>
               <a:t>14</a:t>
+            </a:fld>
+            <a:endParaRPr lang="en-US"/>
+          </a:p>
+        </p:txBody>
+      </p:sp>
+    </p:spTree>
+    <p:extLst>
+      <p:ext uri="{BB962C8B-B14F-4D97-AF65-F5344CB8AC3E}">
+        <p14:creationId xmlns:p14="http://schemas.microsoft.com/office/powerpoint/2010/main" val="1024086991"/>
+      </p:ext>
+    </p:extLst>
+  </p:cSld>
+  <p:clrMapOvr>
+    <a:masterClrMapping/>
+  </p:clrMapOvr>
+</p:notes>
+</file>
+
+<file path=ppt/notesSlides/notesSlide15.xml><?xml version="1.0" encoding="utf-8"?>
+<p:notes xmlns:a="http://schemas.openxmlformats.org/drawingml/2006/main" xmlns:r="http://schemas.openxmlformats.org/officeDocument/2006/relationships" xmlns:p="http://schemas.openxmlformats.org/presentationml/2006/main">
+  <p:cSld>
+    <p:spTree>
+      <p:nvGrpSpPr>
+        <p:cNvPr id="1" name=""/>
+        <p:cNvGrpSpPr/>
+        <p:nvPr/>
+      </p:nvGrpSpPr>
+      <p:grpSpPr>
+        <a:xfrm>
+          <a:off x="0" y="0"/>
+          <a:ext cx="0" cy="0"/>
+          <a:chOff x="0" y="0"/>
+          <a:chExt cx="0" cy="0"/>
+        </a:xfrm>
+      </p:grpSpPr>
+      <p:sp>
+        <p:nvSpPr>
+          <p:cNvPr id="2" name="Slide Image Placeholder 1"/>
+          <p:cNvSpPr>
+            <a:spLocks noGrp="1" noRot="1" noChangeAspect="1"/>
+          </p:cNvSpPr>
+          <p:nvPr>
+            <p:ph type="sldImg"/>
+          </p:nvPr>
+        </p:nvSpPr>
+        <p:spPr/>
+      </p:sp>
+      <p:sp>
+        <p:nvSpPr>
+          <p:cNvPr id="3" name="Notes Placeholder 2"/>
+          <p:cNvSpPr>
+            <a:spLocks noGrp="1"/>
+          </p:cNvSpPr>
+          <p:nvPr>
+            <p:ph type="body" idx="1"/>
+          </p:nvPr>
+        </p:nvSpPr>
+        <p:spPr/>
+        <p:txBody>
+          <a:bodyPr/>
+          <a:lstStyle/>
+          <a:p>
+            <a:r>
+              <a:rPr lang="en-US" dirty="0"/>
+              <a:t/>
+            </a:r>
+            <a:endParaRPr lang="en-US" dirty="0"/>
+          </a:p>
+        </p:txBody>
+      </p:sp>
+      <p:sp>
+        <p:nvSpPr>
+          <p:cNvPr id="4" name="Slide Number Placeholder 3"/>
+          <p:cNvSpPr>
+            <a:spLocks noGrp="1"/>
+          </p:cNvSpPr>
+          <p:nvPr>
+            <p:ph type="sldNum" sz="quarter" idx="10"/>
+          </p:nvPr>
+        </p:nvSpPr>
+        <p:spPr/>
+        <p:txBody>
+          <a:bodyPr/>
+          <a:lstStyle/>
+          <a:p>
+            <a:fld id="{F7021451-1387-4CA6-816F-3879F97B5CBC}" type="slidenum">
+              <a:rPr lang="en-US"/>
+              <a:t>15</a:t>
             </a:fld>
             <a:endParaRPr lang="en-US"/>
           </a:p>
@@ -2072,7 +2161,7 @@
                 <a:ea typeface="微软雅黑" pitchFamily="34" charset="-122"/>
                 <a:cs typeface="微软雅黑" pitchFamily="34" charset="-120"/>
               </a:rPr>
-              <a:t>1 / 14</a:t>
+              <a:t>1 / 15</a:t>
             </a:r>
             <a:endParaRPr lang="en-US" sz="1000" dirty="0"/>
           </a:p>
@@ -2306,7 +2395,7 @@
                 <a:ea typeface="微软雅黑" pitchFamily="34" charset="-122"/>
                 <a:cs typeface="微软雅黑" pitchFamily="34" charset="-120"/>
               </a:rPr>
-              <a:t>10 / 14</a:t>
+              <a:t>10 / 15</a:t>
             </a:r>
             <a:endParaRPr lang="en-US" sz="1000" dirty="0"/>
           </a:p>
@@ -2345,7 +2434,7 @@
                 <a:ea typeface="微软雅黑" pitchFamily="34" charset="-122"/>
                 <a:cs typeface="微软雅黑" pitchFamily="34" charset="-120"/>
               </a:rPr>
-              <a:t>typedef</a:t>
+              <a:t>对比</a:t>
             </a:r>
             <a:endParaRPr lang="en-US" sz="1400" dirty="0"/>
           </a:p>
@@ -2384,7 +2473,7 @@
                 <a:ea typeface="微软雅黑" pitchFamily="34" charset="-122"/>
                 <a:cs typeface="微软雅黑" pitchFamily="34" charset="-120"/>
               </a:rPr>
-              <a:t>typedef：给类型起别名</a:t>
+              <a:t>typedef与#define：一个是类型别名，一个是文本替换</a:t>
             </a:r>
             <a:endParaRPr lang="en-US" sz="2800" dirty="0"/>
           </a:p>
@@ -2392,28 +2481,87 @@
       </p:sp>
       <p:sp>
         <p:nvSpPr>
-          <p:cNvPr id="5" name="Shape 3"/>
-          <p:cNvSpPr/>
-          <p:nvPr/>
-        </p:nvSpPr>
-        <p:spPr>
-          <a:xfrm>
-            <a:off x="822960" y="2395728"/>
-            <a:ext cx="10545775" cy="1033272"/>
-          </a:xfrm>
-          <a:prstGeom prst="rect">
-            <a:avLst/>
-          </a:prstGeom>
-          <a:solidFill>
-            <a:srgbClr val="F5F6F7"/>
-          </a:solidFill>
-          <a:ln w="9525">
-            <a:solidFill>
-              <a:srgbClr val="D8DBE0"/>
-            </a:solidFill>
-            <a:prstDash val="solid"/>
-          </a:ln>
-        </p:spPr>
+          <p:cNvPr id="5" name="Text 3"/>
+          <p:cNvSpPr/>
+          <p:nvPr/>
+        </p:nvSpPr>
+        <p:spPr>
+          <a:xfrm>
+            <a:off x="896112" y="2395728"/>
+            <a:ext cx="10454335" cy="740664"/>
+          </a:xfrm>
+          <a:prstGeom prst="rect">
+            <a:avLst/>
+          </a:prstGeom>
+          <a:noFill/>
+          <a:ln/>
+        </p:spPr>
+        <p:txBody>
+          <a:bodyPr wrap="square" rtlCol="0" anchor="t"/>
+          <a:lstStyle/>
+          <a:p>
+            <a:pPr algn="l" indent="0" marL="0">
+              <a:lnSpc>
+                <a:spcPct val="115000"/>
+              </a:lnSpc>
+              <a:buNone/>
+            </a:pPr>
+            <a:r>
+              <a:rPr lang="en-US" sz="1800" b="1" dirty="0">
+                <a:solidFill>
+                  <a:srgbClr val="1F4E9C"/>
+                </a:solidFill>
+                <a:latin typeface="微软雅黑" pitchFamily="34" charset="0"/>
+                <a:ea typeface="微软雅黑" pitchFamily="34" charset="-122"/>
+                <a:cs typeface="微软雅黑" pitchFamily="34" charset="-120"/>
+              </a:rPr>
+              <a:t>•  </a:t>
+            </a:r>
+            <a:pPr algn="l" indent="0" marL="0">
+              <a:lnSpc>
+                <a:spcPct val="115000"/>
+              </a:lnSpc>
+              <a:buNone/>
+            </a:pPr>
+            <a:r>
+              <a:rPr lang="en-US" sz="1800" dirty="0">
+                <a:solidFill>
+                  <a:srgbClr val="000000"/>
+                </a:solidFill>
+              </a:rPr>
+              <a:t>#define PSTU struct Student是预处理阶段的</a:t>
+            </a:r>
+            <a:pPr algn="l" indent="0" marL="0">
+              <a:lnSpc>
+                <a:spcPct val="115000"/>
+              </a:lnSpc>
+              <a:buNone/>
+            </a:pPr>
+            <a:r>
+              <a:rPr lang="en-US" sz="1800" b="1" dirty="0">
+                <a:solidFill>
+                  <a:srgbClr val="000000"/>
+                </a:solidFill>
+              </a:rPr>
+              <a:t>文本替换</a:t>
+            </a:r>
+            <a:pPr algn="l" indent="0" marL="0">
+              <a:lnSpc>
+                <a:spcPct val="115000"/>
+              </a:lnSpc>
+              <a:buNone/>
+            </a:pPr>
+            <a:r>
+              <a:rPr lang="en-US" sz="1800" dirty="0">
+                <a:solidFill>
+                  <a:srgbClr val="000000"/>
+                </a:solidFill>
+              </a:rPr>
+              <a:t>，只管抄写</a:t>
+            </a:r>
+            <a:endParaRPr lang="en-US" sz="1800" dirty="0"/>
+          </a:p>
+        </p:txBody>
       </p:sp>
       <p:sp>
         <p:nvSpPr>
@@ -2423,8 +2571,8 @@
         </p:nvSpPr>
         <p:spPr>
           <a:xfrm>
-            <a:off x="1078992" y="2505456"/>
-            <a:ext cx="10033711" cy="813816"/>
+            <a:off x="896112" y="3209544"/>
+            <a:ext cx="10454335" cy="397764"/>
           </a:xfrm>
           <a:prstGeom prst="rect">
             <a:avLst/>
@@ -2438,24 +2586,36 @@
           <a:p>
             <a:pPr algn="l" indent="0" marL="0">
               <a:lnSpc>
-                <a:spcPct val="125000"/>
-              </a:lnSpc>
-              <a:buNone/>
-            </a:pPr>
-            <a:r>
-              <a:rPr lang="en-US" sz="1400" dirty="0">
-                <a:solidFill>
-                  <a:srgbClr val="1F2329"/>
-                </a:solidFill>
-                <a:latin typeface="Consolas" pitchFamily="34" charset="0"/>
-                <a:ea typeface="Consolas" pitchFamily="34" charset="-122"/>
-                <a:cs typeface="Consolas" pitchFamily="34" charset="-120"/>
-              </a:rPr>
-              <a:t>typedef struct Student Stu;
-Stu stu2 = {21, 90.0};     // Stu就是struct Student的别名
-</a:t>
-            </a:r>
-            <a:endParaRPr lang="en-US" sz="1400" dirty="0"/>
+                <a:spcPct val="115000"/>
+              </a:lnSpc>
+              <a:buNone/>
+            </a:pPr>
+            <a:r>
+              <a:rPr lang="en-US" sz="1800" b="1" dirty="0">
+                <a:solidFill>
+                  <a:srgbClr val="1F4E9C"/>
+                </a:solidFill>
+                <a:latin typeface="微软雅黑" pitchFamily="34" charset="0"/>
+                <a:ea typeface="微软雅黑" pitchFamily="34" charset="-122"/>
+                <a:cs typeface="微软雅黑" pitchFamily="34" charset="-120"/>
+              </a:rPr>
+              <a:t>•  </a:t>
+            </a:r>
+            <a:pPr algn="l" indent="0" marL="0">
+              <a:lnSpc>
+                <a:spcPct val="115000"/>
+              </a:lnSpc>
+              <a:buNone/>
+            </a:pPr>
+            <a:r>
+              <a:rPr lang="en-US" sz="1800" dirty="0">
+                <a:solidFill>
+                  <a:srgbClr val="000000"/>
+                </a:solidFill>
+              </a:rPr>
+              <a:t>typedef是编译器认可的类型别名，参与类型检查</a:t>
+            </a:r>
+            <a:endParaRPr lang="en-US" sz="1800" dirty="0"/>
           </a:p>
         </p:txBody>
       </p:sp>
@@ -2467,7 +2627,7 @@
         </p:nvSpPr>
         <p:spPr>
           <a:xfrm>
-            <a:off x="896112" y="3630168"/>
+            <a:off x="896112" y="3680460"/>
             <a:ext cx="10454335" cy="397764"/>
           </a:xfrm>
           <a:prstGeom prst="rect">
@@ -2509,119 +2669,7 @@
                   <a:srgbClr val="000000"/>
                 </a:solidFill>
               </a:rPr>
-              <a:t>typedef给现有类型起个短名字，之后用别名声明变量</a:t>
-            </a:r>
-            <a:endParaRPr lang="en-US" sz="1800" dirty="0"/>
-          </a:p>
-        </p:txBody>
-      </p:sp>
-      <p:sp>
-        <p:nvSpPr>
-          <p:cNvPr id="8" name="Text 6"/>
-          <p:cNvSpPr/>
-          <p:nvPr/>
-        </p:nvSpPr>
-        <p:spPr>
-          <a:xfrm>
-            <a:off x="896112" y="4101084"/>
-            <a:ext cx="10454335" cy="397764"/>
-          </a:xfrm>
-          <a:prstGeom prst="rect">
-            <a:avLst/>
-          </a:prstGeom>
-          <a:noFill/>
-          <a:ln/>
-        </p:spPr>
-        <p:txBody>
-          <a:bodyPr wrap="square" rtlCol="0" anchor="t"/>
-          <a:lstStyle/>
-          <a:p>
-            <a:pPr algn="l" indent="0" marL="0">
-              <a:lnSpc>
-                <a:spcPct val="115000"/>
-              </a:lnSpc>
-              <a:buNone/>
-            </a:pPr>
-            <a:r>
-              <a:rPr lang="en-US" sz="1800" b="1" dirty="0">
-                <a:solidFill>
-                  <a:srgbClr val="1F4E9C"/>
-                </a:solidFill>
-                <a:latin typeface="微软雅黑" pitchFamily="34" charset="0"/>
-                <a:ea typeface="微软雅黑" pitchFamily="34" charset="-122"/>
-                <a:cs typeface="微软雅黑" pitchFamily="34" charset="-120"/>
-              </a:rPr>
-              <a:t>•  </a:t>
-            </a:r>
-            <a:pPr algn="l" indent="0" marL="0">
-              <a:lnSpc>
-                <a:spcPct val="115000"/>
-              </a:lnSpc>
-              <a:buNone/>
-            </a:pPr>
-            <a:r>
-              <a:rPr lang="en-US" sz="1800" dirty="0">
-                <a:solidFill>
-                  <a:srgbClr val="000000"/>
-                </a:solidFill>
-              </a:rPr>
-              <a:t>结构体名带着struct前缀写起来长，别名让声明变干净</a:t>
-            </a:r>
-            <a:endParaRPr lang="en-US" sz="1800" dirty="0"/>
-          </a:p>
-        </p:txBody>
-      </p:sp>
-      <p:sp>
-        <p:nvSpPr>
-          <p:cNvPr id="9" name="Text 7"/>
-          <p:cNvSpPr/>
-          <p:nvPr/>
-        </p:nvSpPr>
-        <p:spPr>
-          <a:xfrm>
-            <a:off x="896112" y="4572000"/>
-            <a:ext cx="10454335" cy="397764"/>
-          </a:xfrm>
-          <a:prstGeom prst="rect">
-            <a:avLst/>
-          </a:prstGeom>
-          <a:noFill/>
-          <a:ln/>
-        </p:spPr>
-        <p:txBody>
-          <a:bodyPr wrap="square" rtlCol="0" anchor="t"/>
-          <a:lstStyle/>
-          <a:p>
-            <a:pPr algn="l" indent="0" marL="0">
-              <a:lnSpc>
-                <a:spcPct val="115000"/>
-              </a:lnSpc>
-              <a:buNone/>
-            </a:pPr>
-            <a:r>
-              <a:rPr lang="en-US" sz="1800" b="1" dirty="0">
-                <a:solidFill>
-                  <a:srgbClr val="1F4E9C"/>
-                </a:solidFill>
-                <a:latin typeface="微软雅黑" pitchFamily="34" charset="0"/>
-                <a:ea typeface="微软雅黑" pitchFamily="34" charset="-122"/>
-                <a:cs typeface="微软雅黑" pitchFamily="34" charset="-120"/>
-              </a:rPr>
-              <a:t>•  </a:t>
-            </a:r>
-            <a:pPr algn="l" indent="0" marL="0">
-              <a:lnSpc>
-                <a:spcPct val="115000"/>
-              </a:lnSpc>
-              <a:buNone/>
-            </a:pPr>
-            <a:r>
-              <a:rPr lang="en-US" sz="1800" dirty="0">
-                <a:solidFill>
-                  <a:srgbClr val="000000"/>
-                </a:solidFill>
-              </a:rPr>
-              <a:t>别名和原名完全等价，用哪个编译器都认</a:t>
+              <a:t>声明类型别名用typedef，#define的老本行是定义常量</a:t>
             </a:r>
             <a:endParaRPr lang="en-US" sz="1800" dirty="0"/>
           </a:p>
@@ -2699,7 +2747,7 @@
                 <a:ea typeface="微软雅黑" pitchFamily="34" charset="-122"/>
                 <a:cs typeface="微软雅黑" pitchFamily="34" charset="-120"/>
               </a:rPr>
-              <a:t>11 / 14</a:t>
+              <a:t>11 / 15</a:t>
             </a:r>
             <a:endParaRPr lang="en-US" sz="1000" dirty="0"/>
           </a:p>
@@ -2738,7 +2786,7 @@
                 <a:ea typeface="微软雅黑" pitchFamily="34" charset="-122"/>
                 <a:cs typeface="微软雅黑" pitchFamily="34" charset="-120"/>
               </a:rPr>
-              <a:t>对比</a:t>
+              <a:t>兄弟知识点</a:t>
             </a:r>
             <a:endParaRPr lang="en-US" sz="1400" dirty="0"/>
           </a:p>
@@ -2777,7 +2825,7 @@
                 <a:ea typeface="微软雅黑" pitchFamily="34" charset="-122"/>
                 <a:cs typeface="微软雅黑" pitchFamily="34" charset="-120"/>
               </a:rPr>
-              <a:t>typedef与#define：一个是类型别名，一个是文本替换</a:t>
+              <a:t>结构体的邻居：结构体数组、联合、枚举</a:t>
             </a:r>
             <a:endParaRPr lang="en-US" sz="2800" dirty="0"/>
           </a:p>
@@ -2792,7 +2840,7 @@
         <p:spPr>
           <a:xfrm>
             <a:off x="896112" y="2395728"/>
-            <a:ext cx="10454335" cy="740664"/>
+            <a:ext cx="10454335" cy="397764"/>
           </a:xfrm>
           <a:prstGeom prst="rect">
             <a:avLst/>
@@ -2833,8 +2881,33 @@
                   <a:srgbClr val="000000"/>
                 </a:solidFill>
               </a:rPr>
-              <a:t>#define PSTU struct Student是预处理阶段的</a:t>
-            </a:r>
+              <a:t>结构体数组：把多个结构体排成数组，Stu list[10]就是十个学生排一排</a:t>
+            </a:r>
+            <a:endParaRPr lang="en-US" sz="1800" dirty="0"/>
+          </a:p>
+        </p:txBody>
+      </p:sp>
+      <p:sp>
+        <p:nvSpPr>
+          <p:cNvPr id="6" name="Text 4"/>
+          <p:cNvSpPr/>
+          <p:nvPr/>
+        </p:nvSpPr>
+        <p:spPr>
+          <a:xfrm>
+            <a:off x="896112" y="2866644"/>
+            <a:ext cx="10454335" cy="397764"/>
+          </a:xfrm>
+          <a:prstGeom prst="rect">
+            <a:avLst/>
+          </a:prstGeom>
+          <a:noFill/>
+          <a:ln/>
+        </p:spPr>
+        <p:txBody>
+          <a:bodyPr wrap="square" rtlCol="0" anchor="t"/>
+          <a:lstStyle/>
+          <a:p>
             <a:pPr algn="l" indent="0" marL="0">
               <a:lnSpc>
                 <a:spcPct val="115000"/>
@@ -2844,10 +2917,69 @@
             <a:r>
               <a:rPr lang="en-US" sz="1800" b="1" dirty="0">
                 <a:solidFill>
+                  <a:srgbClr val="1F4E9C"/>
+                </a:solidFill>
+                <a:latin typeface="微软雅黑" pitchFamily="34" charset="0"/>
+                <a:ea typeface="微软雅黑" pitchFamily="34" charset="-122"/>
+                <a:cs typeface="微软雅黑" pitchFamily="34" charset="-120"/>
+              </a:rPr>
+              <a:t>•  </a:t>
+            </a:r>
+            <a:pPr algn="l" indent="0" marL="0">
+              <a:lnSpc>
+                <a:spcPct val="115000"/>
+              </a:lnSpc>
+              <a:buNone/>
+            </a:pPr>
+            <a:r>
+              <a:rPr lang="en-US" sz="1800" dirty="0">
+                <a:solidFill>
                   <a:srgbClr val="000000"/>
                 </a:solidFill>
               </a:rPr>
-              <a:t>文本替换</a:t>
+              <a:t>联合（union）：多个成员共用同一片格子，同一时间只住一个</a:t>
+            </a:r>
+            <a:endParaRPr lang="en-US" sz="1800" dirty="0"/>
+          </a:p>
+        </p:txBody>
+      </p:sp>
+      <p:sp>
+        <p:nvSpPr>
+          <p:cNvPr id="7" name="Text 5"/>
+          <p:cNvSpPr/>
+          <p:nvPr/>
+        </p:nvSpPr>
+        <p:spPr>
+          <a:xfrm>
+            <a:off x="896112" y="3337560"/>
+            <a:ext cx="10454335" cy="397764"/>
+          </a:xfrm>
+          <a:prstGeom prst="rect">
+            <a:avLst/>
+          </a:prstGeom>
+          <a:noFill/>
+          <a:ln/>
+        </p:spPr>
+        <p:txBody>
+          <a:bodyPr wrap="square" rtlCol="0" anchor="t"/>
+          <a:lstStyle/>
+          <a:p>
+            <a:pPr algn="l" indent="0" marL="0">
+              <a:lnSpc>
+                <a:spcPct val="115000"/>
+              </a:lnSpc>
+              <a:buNone/>
+            </a:pPr>
+            <a:r>
+              <a:rPr lang="en-US" sz="1800" b="1" dirty="0">
+                <a:solidFill>
+                  <a:srgbClr val="1F4E9C"/>
+                </a:solidFill>
+                <a:latin typeface="微软雅黑" pitchFamily="34" charset="0"/>
+                <a:ea typeface="微软雅黑" pitchFamily="34" charset="-122"/>
+                <a:cs typeface="微软雅黑" pitchFamily="34" charset="-120"/>
+              </a:rPr>
+              <a:t>•  </a:t>
             </a:r>
             <a:pPr algn="l" indent="0" marL="0">
               <a:lnSpc>
@@ -2861,7 +2993,7 @@
                   <a:srgbClr val="000000"/>
                 </a:solidFill>
               </a:rPr>
-              <a:t>，只管抄写</a:t>
+              <a:t>枚举（enum）：把一组常量名字排成队，如星期、方向</a:t>
             </a:r>
             <a:endParaRPr lang="en-US" sz="1800" dirty="0"/>
           </a:p>
@@ -2869,13 +3001,13 @@
       </p:sp>
       <p:sp>
         <p:nvSpPr>
-          <p:cNvPr id="6" name="Text 4"/>
-          <p:cNvSpPr/>
-          <p:nvPr/>
-        </p:nvSpPr>
-        <p:spPr>
-          <a:xfrm>
-            <a:off x="896112" y="3209544"/>
+          <p:cNvPr id="8" name="Text 6"/>
+          <p:cNvSpPr/>
+          <p:nvPr/>
+        </p:nvSpPr>
+        <p:spPr>
+          <a:xfrm>
+            <a:off x="896112" y="3808476"/>
             <a:ext cx="10454335" cy="397764"/>
           </a:xfrm>
           <a:prstGeom prst="rect">
@@ -2917,63 +3049,7 @@
                   <a:srgbClr val="000000"/>
                 </a:solidFill>
               </a:rPr>
-              <a:t>typedef是编译器认可的类型别名，参与类型检查</a:t>
-            </a:r>
-            <a:endParaRPr lang="en-US" sz="1800" dirty="0"/>
-          </a:p>
-        </p:txBody>
-      </p:sp>
-      <p:sp>
-        <p:nvSpPr>
-          <p:cNvPr id="7" name="Text 5"/>
-          <p:cNvSpPr/>
-          <p:nvPr/>
-        </p:nvSpPr>
-        <p:spPr>
-          <a:xfrm>
-            <a:off x="896112" y="3680460"/>
-            <a:ext cx="10454335" cy="397764"/>
-          </a:xfrm>
-          <a:prstGeom prst="rect">
-            <a:avLst/>
-          </a:prstGeom>
-          <a:noFill/>
-          <a:ln/>
-        </p:spPr>
-        <p:txBody>
-          <a:bodyPr wrap="square" rtlCol="0" anchor="t"/>
-          <a:lstStyle/>
-          <a:p>
-            <a:pPr algn="l" indent="0" marL="0">
-              <a:lnSpc>
-                <a:spcPct val="115000"/>
-              </a:lnSpc>
-              <a:buNone/>
-            </a:pPr>
-            <a:r>
-              <a:rPr lang="en-US" sz="1800" b="1" dirty="0">
-                <a:solidFill>
-                  <a:srgbClr val="1F4E9C"/>
-                </a:solidFill>
-                <a:latin typeface="微软雅黑" pitchFamily="34" charset="0"/>
-                <a:ea typeface="微软雅黑" pitchFamily="34" charset="-122"/>
-                <a:cs typeface="微软雅黑" pitchFamily="34" charset="-120"/>
-              </a:rPr>
-              <a:t>•  </a:t>
-            </a:r>
-            <a:pPr algn="l" indent="0" marL="0">
-              <a:lnSpc>
-                <a:spcPct val="115000"/>
-              </a:lnSpc>
-              <a:buNone/>
-            </a:pPr>
-            <a:r>
-              <a:rPr lang="en-US" sz="1800" dirty="0">
-                <a:solidFill>
-                  <a:srgbClr val="000000"/>
-                </a:solidFill>
-              </a:rPr>
-              <a:t>声明类型别名用typedef，#define的老本行是定义常量</a:t>
+              <a:t>这三样本课不展开，但你要知道它们存在，读代码碰到别陌生</a:t>
             </a:r>
             <a:endParaRPr lang="en-US" sz="1800" dirty="0"/>
           </a:p>
@@ -3051,7 +3127,7 @@
                 <a:ea typeface="微软雅黑" pitchFamily="34" charset="-122"/>
                 <a:cs typeface="微软雅黑" pitchFamily="34" charset="-120"/>
               </a:rPr>
-              <a:t>12 / 14</a:t>
+              <a:t>12 / 15</a:t>
             </a:r>
             <a:endParaRPr lang="en-US" sz="1000" dirty="0"/>
           </a:p>
@@ -3090,7 +3166,7 @@
                 <a:ea typeface="微软雅黑" pitchFamily="34" charset="-122"/>
                 <a:cs typeface="微软雅黑" pitchFamily="34" charset="-120"/>
               </a:rPr>
-              <a:t>兄弟知识点</a:t>
+              <a:t>本节小结</a:t>
             </a:r>
             <a:endParaRPr lang="en-US" sz="1400" dirty="0"/>
           </a:p>
@@ -3129,7 +3205,7 @@
                 <a:ea typeface="微软雅黑" pitchFamily="34" charset="-122"/>
                 <a:cs typeface="微软雅黑" pitchFamily="34" charset="-120"/>
               </a:rPr>
-              <a:t>结构体的邻居：结构体数组、联合、枚举</a:t>
+              <a:t>今天就三件事</a:t>
             </a:r>
             <a:endParaRPr lang="en-US" sz="2800" dirty="0"/>
           </a:p>
@@ -3185,7 +3261,7 @@
                   <a:srgbClr val="000000"/>
                 </a:solidFill>
               </a:rPr>
-              <a:t>结构体数组：把多个结构体排成数组，Stu list[10]就是十个学生排一排</a:t>
+              <a:t>struct把多个成员打包成新类型；点号取成员；末尾分号不能丢</a:t>
             </a:r>
             <a:endParaRPr lang="en-US" sz="1800" dirty="0"/>
           </a:p>
@@ -3241,7 +3317,7 @@
                   <a:srgbClr val="000000"/>
                 </a:solidFill>
               </a:rPr>
-              <a:t>联合（union）：多个成员共用同一片格子，同一时间只住一个</a:t>
+              <a:t>结构体有地址，指针指向它；(*p).age带括号，p-&gt;age是简写</a:t>
             </a:r>
             <a:endParaRPr lang="en-US" sz="1800" dirty="0"/>
           </a:p>
@@ -3297,7 +3373,7 @@
                   <a:srgbClr val="000000"/>
                 </a:solidFill>
               </a:rPr>
-              <a:t>枚举（enum）：把一组常量名字排成队，如星期、方向</a:t>
+              <a:t>typedef给类型起别名，和#define的文本替换是两码事</a:t>
             </a:r>
             <a:endParaRPr lang="en-US" sz="1800" dirty="0"/>
           </a:p>
@@ -3311,8 +3387,8 @@
         </p:nvSpPr>
         <p:spPr>
           <a:xfrm>
-            <a:off x="896112" y="3808476"/>
-            <a:ext cx="10454335" cy="397764"/>
+            <a:off x="822960" y="3899916"/>
+            <a:ext cx="10545775" cy="358902"/>
           </a:xfrm>
           <a:prstGeom prst="rect">
             <a:avLst/>
@@ -3325,37 +3401,20 @@
           <a:lstStyle/>
           <a:p>
             <a:pPr algn="l" indent="0" marL="0">
-              <a:lnSpc>
-                <a:spcPct val="115000"/>
-              </a:lnSpc>
-              <a:buNone/>
-            </a:pPr>
-            <a:r>
-              <a:rPr lang="en-US" sz="1800" b="1" dirty="0">
-                <a:solidFill>
-                  <a:srgbClr val="1F4E9C"/>
-                </a:solidFill>
-                <a:latin typeface="微软雅黑" pitchFamily="34" charset="0"/>
-                <a:ea typeface="微软雅黑" pitchFamily="34" charset="-122"/>
-                <a:cs typeface="微软雅黑" pitchFamily="34" charset="-120"/>
-              </a:rPr>
-              <a:t>•  </a:t>
-            </a:r>
-            <a:pPr algn="l" indent="0" marL="0">
-              <a:lnSpc>
-                <a:spcPct val="115000"/>
-              </a:lnSpc>
-              <a:buNone/>
-            </a:pPr>
-            <a:r>
-              <a:rPr lang="en-US" sz="1800" dirty="0">
-                <a:solidFill>
-                  <a:srgbClr val="000000"/>
-                </a:solidFill>
-              </a:rPr>
-              <a:t>这三样本课不展开，但你要知道它们存在，读代码碰到别陌生</a:t>
-            </a:r>
-            <a:endParaRPr lang="en-US" sz="1800" dirty="0"/>
+              <a:buNone/>
+            </a:pPr>
+            <a:r>
+              <a:rPr lang="en-US" sz="1500" dirty="0">
+                <a:solidFill>
+                  <a:srgbClr val="8A9099"/>
+                </a:solidFill>
+                <a:latin typeface="微软雅黑" pitchFamily="34" charset="0"/>
+                <a:ea typeface="微软雅黑" pitchFamily="34" charset="-122"/>
+                <a:cs typeface="微软雅黑" pitchFamily="34" charset="-120"/>
+              </a:rPr>
+              <a:t>下一节：动态内存，学malloc怎么在堆上造格子</a:t>
+            </a:r>
+            <a:endParaRPr lang="en-US" sz="1500" dirty="0"/>
           </a:p>
         </p:txBody>
       </p:sp>
@@ -3431,7 +3490,7 @@
                 <a:ea typeface="微软雅黑" pitchFamily="34" charset="-122"/>
                 <a:cs typeface="微软雅黑" pitchFamily="34" charset="-120"/>
               </a:rPr>
-              <a:t>13 / 14</a:t>
+              <a:t>13 / 15</a:t>
             </a:r>
             <a:endParaRPr lang="en-US" sz="1000" dirty="0"/>
           </a:p>
@@ -3470,7 +3529,7 @@
                 <a:ea typeface="微软雅黑" pitchFamily="34" charset="-122"/>
                 <a:cs typeface="微软雅黑" pitchFamily="34" charset="-120"/>
               </a:rPr>
-              <a:t>本节小结</a:t>
+              <a:t>课后任务</a:t>
             </a:r>
             <a:endParaRPr lang="en-US" sz="1400" dirty="0"/>
           </a:p>
@@ -3509,7 +3568,7 @@
                 <a:ea typeface="微软雅黑" pitchFamily="34" charset="-122"/>
                 <a:cs typeface="微软雅黑" pitchFamily="34" charset="-120"/>
               </a:rPr>
-              <a:t>今天就三件事</a:t>
+              <a:t>1道跟练 ＋ 1道模仿</a:t>
             </a:r>
             <a:endParaRPr lang="en-US" sz="2800" dirty="0"/>
           </a:p>
@@ -3524,6 +3583,146 @@
         <p:spPr>
           <a:xfrm>
             <a:off x="896112" y="2395728"/>
+            <a:ext cx="10454335" cy="740664"/>
+          </a:xfrm>
+          <a:prstGeom prst="rect">
+            <a:avLst/>
+          </a:prstGeom>
+          <a:noFill/>
+          <a:ln/>
+        </p:spPr>
+        <p:txBody>
+          <a:bodyPr wrap="square" rtlCol="0" anchor="t"/>
+          <a:lstStyle/>
+          <a:p>
+            <a:pPr algn="l" indent="0" marL="0">
+              <a:lnSpc>
+                <a:spcPct val="115000"/>
+              </a:lnSpc>
+              <a:buNone/>
+            </a:pPr>
+            <a:r>
+              <a:rPr lang="en-US" sz="1800" b="1" dirty="0">
+                <a:solidFill>
+                  <a:srgbClr val="1F4E9C"/>
+                </a:solidFill>
+                <a:latin typeface="微软雅黑" pitchFamily="34" charset="0"/>
+                <a:ea typeface="微软雅黑" pitchFamily="34" charset="-122"/>
+                <a:cs typeface="微软雅黑" pitchFamily="34" charset="-120"/>
+              </a:rPr>
+              <a:t>•  </a:t>
+            </a:r>
+            <a:pPr algn="l" indent="0" marL="0">
+              <a:lnSpc>
+                <a:spcPct val="115000"/>
+              </a:lnSpc>
+              <a:buNone/>
+            </a:pPr>
+            <a:r>
+              <a:rPr lang="en-US" sz="1800" b="1" dirty="0">
+                <a:solidFill>
+                  <a:srgbClr val="000000"/>
+                </a:solidFill>
+              </a:rPr>
+              <a:t>跟练题</a:t>
+            </a:r>
+            <a:pPr algn="l" indent="0" marL="0">
+              <a:lnSpc>
+                <a:spcPct val="115000"/>
+              </a:lnSpc>
+              <a:buNone/>
+            </a:pPr>
+            <a:r>
+              <a:rPr lang="en-US" sz="1800" dirty="0">
+                <a:solidFill>
+                  <a:srgbClr val="000000"/>
+                </a:solidFill>
+              </a:rPr>
+              <a:t>：定义struct Book（int pages; double price），造一个变量并初始化，用点号打印两个成员，再画内存图</a:t>
+            </a:r>
+            <a:endParaRPr lang="en-US" sz="1800" dirty="0"/>
+          </a:p>
+        </p:txBody>
+      </p:sp>
+      <p:sp>
+        <p:nvSpPr>
+          <p:cNvPr id="6" name="Text 4"/>
+          <p:cNvSpPr/>
+          <p:nvPr/>
+        </p:nvSpPr>
+        <p:spPr>
+          <a:xfrm>
+            <a:off x="896112" y="3209544"/>
+            <a:ext cx="10454335" cy="740664"/>
+          </a:xfrm>
+          <a:prstGeom prst="rect">
+            <a:avLst/>
+          </a:prstGeom>
+          <a:noFill/>
+          <a:ln/>
+        </p:spPr>
+        <p:txBody>
+          <a:bodyPr wrap="square" rtlCol="0" anchor="t"/>
+          <a:lstStyle/>
+          <a:p>
+            <a:pPr algn="l" indent="0" marL="0">
+              <a:lnSpc>
+                <a:spcPct val="115000"/>
+              </a:lnSpc>
+              <a:buNone/>
+            </a:pPr>
+            <a:r>
+              <a:rPr lang="en-US" sz="1800" b="1" dirty="0">
+                <a:solidFill>
+                  <a:srgbClr val="1F4E9C"/>
+                </a:solidFill>
+                <a:latin typeface="微软雅黑" pitchFamily="34" charset="0"/>
+                <a:ea typeface="微软雅黑" pitchFamily="34" charset="-122"/>
+                <a:cs typeface="微软雅黑" pitchFamily="34" charset="-120"/>
+              </a:rPr>
+              <a:t>•  </a:t>
+            </a:r>
+            <a:pPr algn="l" indent="0" marL="0">
+              <a:lnSpc>
+                <a:spcPct val="115000"/>
+              </a:lnSpc>
+              <a:buNone/>
+            </a:pPr>
+            <a:r>
+              <a:rPr lang="en-US" sz="1800" b="1" dirty="0">
+                <a:solidFill>
+                  <a:srgbClr val="000000"/>
+                </a:solidFill>
+              </a:rPr>
+              <a:t>模仿题</a:t>
+            </a:r>
+            <a:pPr algn="l" indent="0" marL="0">
+              <a:lnSpc>
+                <a:spcPct val="115000"/>
+              </a:lnSpc>
+              <a:buNone/>
+            </a:pPr>
+            <a:r>
+              <a:rPr lang="en-US" sz="1800" dirty="0">
+                <a:solidFill>
+                  <a:srgbClr val="000000"/>
+                </a:solidFill>
+              </a:rPr>
+              <a:t>：声明struct Book *p指向它，分别用(*p).pages和p-&gt;pages打印，确认结果一样</a:t>
+            </a:r>
+            <a:endParaRPr lang="en-US" sz="1800" dirty="0"/>
+          </a:p>
+        </p:txBody>
+      </p:sp>
+      <p:sp>
+        <p:nvSpPr>
+          <p:cNvPr id="7" name="Text 5"/>
+          <p:cNvSpPr/>
+          <p:nvPr/>
+        </p:nvSpPr>
+        <p:spPr>
+          <a:xfrm>
+            <a:off x="896112" y="4023360"/>
             <a:ext cx="10454335" cy="397764"/>
           </a:xfrm>
           <a:prstGeom prst="rect">
@@ -3565,7 +3764,7 @@
                   <a:srgbClr val="000000"/>
                 </a:solidFill>
               </a:rPr>
-              <a:t>struct把多个成员打包成新类型；点号取成员；末尾分号不能丢</a:t>
+              <a:t>要求：合上资料默写结构体定义与p-&gt;age；两道题先纸上后上机</a:t>
             </a:r>
             <a:endParaRPr lang="en-US" sz="1800" dirty="0"/>
           </a:p>
@@ -3573,14 +3772,14 @@
       </p:sp>
       <p:sp>
         <p:nvSpPr>
-          <p:cNvPr id="6" name="Text 4"/>
-          <p:cNvSpPr/>
-          <p:nvPr/>
-        </p:nvSpPr>
-        <p:spPr>
-          <a:xfrm>
-            <a:off x="896112" y="2866644"/>
-            <a:ext cx="10454335" cy="397764"/>
+          <p:cNvPr id="8" name="Text 6"/>
+          <p:cNvSpPr/>
+          <p:nvPr/>
+        </p:nvSpPr>
+        <p:spPr>
+          <a:xfrm>
+            <a:off x="822960" y="4585716"/>
+            <a:ext cx="10545775" cy="358902"/>
           </a:xfrm>
           <a:prstGeom prst="rect">
             <a:avLst/>
@@ -3593,118 +3792,6 @@
           <a:lstStyle/>
           <a:p>
             <a:pPr algn="l" indent="0" marL="0">
-              <a:lnSpc>
-                <a:spcPct val="115000"/>
-              </a:lnSpc>
-              <a:buNone/>
-            </a:pPr>
-            <a:r>
-              <a:rPr lang="en-US" sz="1800" b="1" dirty="0">
-                <a:solidFill>
-                  <a:srgbClr val="1F4E9C"/>
-                </a:solidFill>
-                <a:latin typeface="微软雅黑" pitchFamily="34" charset="0"/>
-                <a:ea typeface="微软雅黑" pitchFamily="34" charset="-122"/>
-                <a:cs typeface="微软雅黑" pitchFamily="34" charset="-120"/>
-              </a:rPr>
-              <a:t>•  </a:t>
-            </a:r>
-            <a:pPr algn="l" indent="0" marL="0">
-              <a:lnSpc>
-                <a:spcPct val="115000"/>
-              </a:lnSpc>
-              <a:buNone/>
-            </a:pPr>
-            <a:r>
-              <a:rPr lang="en-US" sz="1800" dirty="0">
-                <a:solidFill>
-                  <a:srgbClr val="000000"/>
-                </a:solidFill>
-              </a:rPr>
-              <a:t>结构体有地址，指针指向它；(*p).age带括号，p-&gt;age是简写</a:t>
-            </a:r>
-            <a:endParaRPr lang="en-US" sz="1800" dirty="0"/>
-          </a:p>
-        </p:txBody>
-      </p:sp>
-      <p:sp>
-        <p:nvSpPr>
-          <p:cNvPr id="7" name="Text 5"/>
-          <p:cNvSpPr/>
-          <p:nvPr/>
-        </p:nvSpPr>
-        <p:spPr>
-          <a:xfrm>
-            <a:off x="896112" y="3337560"/>
-            <a:ext cx="10454335" cy="397764"/>
-          </a:xfrm>
-          <a:prstGeom prst="rect">
-            <a:avLst/>
-          </a:prstGeom>
-          <a:noFill/>
-          <a:ln/>
-        </p:spPr>
-        <p:txBody>
-          <a:bodyPr wrap="square" rtlCol="0" anchor="t"/>
-          <a:lstStyle/>
-          <a:p>
-            <a:pPr algn="l" indent="0" marL="0">
-              <a:lnSpc>
-                <a:spcPct val="115000"/>
-              </a:lnSpc>
-              <a:buNone/>
-            </a:pPr>
-            <a:r>
-              <a:rPr lang="en-US" sz="1800" b="1" dirty="0">
-                <a:solidFill>
-                  <a:srgbClr val="1F4E9C"/>
-                </a:solidFill>
-                <a:latin typeface="微软雅黑" pitchFamily="34" charset="0"/>
-                <a:ea typeface="微软雅黑" pitchFamily="34" charset="-122"/>
-                <a:cs typeface="微软雅黑" pitchFamily="34" charset="-120"/>
-              </a:rPr>
-              <a:t>•  </a:t>
-            </a:r>
-            <a:pPr algn="l" indent="0" marL="0">
-              <a:lnSpc>
-                <a:spcPct val="115000"/>
-              </a:lnSpc>
-              <a:buNone/>
-            </a:pPr>
-            <a:r>
-              <a:rPr lang="en-US" sz="1800" dirty="0">
-                <a:solidFill>
-                  <a:srgbClr val="000000"/>
-                </a:solidFill>
-              </a:rPr>
-              <a:t>typedef给类型起别名，和#define的文本替换是两码事</a:t>
-            </a:r>
-            <a:endParaRPr lang="en-US" sz="1800" dirty="0"/>
-          </a:p>
-        </p:txBody>
-      </p:sp>
-      <p:sp>
-        <p:nvSpPr>
-          <p:cNvPr id="8" name="Text 6"/>
-          <p:cNvSpPr/>
-          <p:nvPr/>
-        </p:nvSpPr>
-        <p:spPr>
-          <a:xfrm>
-            <a:off x="822960" y="3899916"/>
-            <a:ext cx="10545775" cy="358902"/>
-          </a:xfrm>
-          <a:prstGeom prst="rect">
-            <a:avLst/>
-          </a:prstGeom>
-          <a:noFill/>
-          <a:ln/>
-        </p:spPr>
-        <p:txBody>
-          <a:bodyPr wrap="square" rtlCol="0" anchor="t"/>
-          <a:lstStyle/>
-          <a:p>
-            <a:pPr algn="l" indent="0" marL="0">
               <a:buNone/>
             </a:pPr>
             <a:r>
@@ -3716,7 +3803,7 @@
                 <a:ea typeface="微软雅黑" pitchFamily="34" charset="-122"/>
                 <a:cs typeface="微软雅黑" pitchFamily="34" charset="-120"/>
               </a:rPr>
-              <a:t>下一节：动态内存，学malloc怎么在堆上造格子</a:t>
+              <a:t>参考答案在本PPT最后两页，课后自行对照</a:t>
             </a:r>
             <a:endParaRPr lang="en-US" sz="1500" dirty="0"/>
           </a:p>
@@ -3794,7 +3881,7 @@
                 <a:ea typeface="微软雅黑" pitchFamily="34" charset="-122"/>
                 <a:cs typeface="微软雅黑" pitchFamily="34" charset="-120"/>
               </a:rPr>
-              <a:t>14 / 14</a:t>
+              <a:t>14 / 15</a:t>
             </a:r>
             <a:endParaRPr lang="en-US" sz="1000" dirty="0"/>
           </a:p>
@@ -3833,7 +3920,7 @@
                 <a:ea typeface="微软雅黑" pitchFamily="34" charset="-122"/>
                 <a:cs typeface="微软雅黑" pitchFamily="34" charset="-120"/>
               </a:rPr>
-              <a:t>课后任务</a:t>
+              <a:t>参考答案 · 跟练题</a:t>
             </a:r>
             <a:endParaRPr lang="en-US" sz="1400" dirty="0"/>
           </a:p>
@@ -3872,7 +3959,7 @@
                 <a:ea typeface="微软雅黑" pitchFamily="34" charset="-122"/>
                 <a:cs typeface="微软雅黑" pitchFamily="34" charset="-120"/>
               </a:rPr>
-              <a:t>1道跟练 ＋ 1道模仿</a:t>
+              <a:t>跟练题参考答案（自行对照）</a:t>
             </a:r>
             <a:endParaRPr lang="en-US" sz="2800" dirty="0"/>
           </a:p>
@@ -3880,14 +3967,54 @@
       </p:sp>
       <p:sp>
         <p:nvSpPr>
-          <p:cNvPr id="5" name="Text 3"/>
-          <p:cNvSpPr/>
-          <p:nvPr/>
-        </p:nvSpPr>
-        <p:spPr>
-          <a:xfrm>
-            <a:off x="896112" y="2395728"/>
-            <a:ext cx="10454335" cy="740664"/>
+          <p:cNvPr id="5" name="Shape 3"/>
+          <p:cNvSpPr/>
+          <p:nvPr/>
+        </p:nvSpPr>
+        <p:spPr>
+          <a:xfrm>
+            <a:off x="822960" y="2395728"/>
+            <a:ext cx="10545775" cy="2221992"/>
+          </a:xfrm>
+          <a:prstGeom prst="rect">
+            <a:avLst/>
+          </a:prstGeom>
+          <a:solidFill>
+            <a:srgbClr val="F7F9FC"/>
+          </a:solidFill>
+          <a:ln/>
+        </p:spPr>
+      </p:sp>
+      <p:sp>
+        <p:nvSpPr>
+          <p:cNvPr id="6" name="Shape 4"/>
+          <p:cNvSpPr/>
+          <p:nvPr/>
+        </p:nvSpPr>
+        <p:spPr>
+          <a:xfrm>
+            <a:off x="822960" y="2395728"/>
+            <a:ext cx="50292" cy="2221992"/>
+          </a:xfrm>
+          <a:prstGeom prst="rect">
+            <a:avLst/>
+          </a:prstGeom>
+          <a:solidFill>
+            <a:srgbClr val="1F4E9C"/>
+          </a:solidFill>
+          <a:ln/>
+        </p:spPr>
+      </p:sp>
+      <p:sp>
+        <p:nvSpPr>
+          <p:cNvPr id="7" name="Text 5"/>
+          <p:cNvSpPr/>
+          <p:nvPr/>
+        </p:nvSpPr>
+        <p:spPr>
+          <a:xfrm>
+            <a:off x="1078992" y="2505456"/>
+            <a:ext cx="10033711" cy="2002536"/>
           </a:xfrm>
           <a:prstGeom prst="rect">
             <a:avLst/>
@@ -3901,6 +4028,55 @@
           <a:p>
             <a:pPr algn="l" indent="0" marL="0">
               <a:lnSpc>
+                <a:spcPct val="125000"/>
+              </a:lnSpc>
+              <a:buNone/>
+            </a:pPr>
+            <a:r>
+              <a:rPr lang="en-US" sz="1400" dirty="0">
+                <a:solidFill>
+                  <a:srgbClr val="1F2329"/>
+                </a:solidFill>
+                <a:latin typeface="Consolas" pitchFamily="34" charset="0"/>
+                <a:ea typeface="Consolas" pitchFamily="34" charset="-122"/>
+                <a:cs typeface="Consolas" pitchFamily="34" charset="-120"/>
+              </a:rPr>
+              <a:t>// 定义、初始化、点号访问
+struct Book {
+    int pages;
+    double price;
+};
+struct Book bk = {320, 45.5};
+printf("%d %.1f\n", bk.pages, bk.price);   // 320 45.5
+</a:t>
+            </a:r>
+            <a:endParaRPr lang="en-US" sz="1400" dirty="0"/>
+          </a:p>
+        </p:txBody>
+      </p:sp>
+      <p:sp>
+        <p:nvSpPr>
+          <p:cNvPr id="8" name="Text 6"/>
+          <p:cNvSpPr/>
+          <p:nvPr/>
+        </p:nvSpPr>
+        <p:spPr>
+          <a:xfrm>
+            <a:off x="896112" y="4818888"/>
+            <a:ext cx="10454335" cy="397764"/>
+          </a:xfrm>
+          <a:prstGeom prst="rect">
+            <a:avLst/>
+          </a:prstGeom>
+          <a:noFill/>
+          <a:ln/>
+        </p:spPr>
+        <p:txBody>
+          <a:bodyPr wrap="square" rtlCol="0" anchor="t"/>
+          <a:lstStyle/>
+          <a:p>
+            <a:pPr algn="l" indent="0" marL="0">
+              <a:lnSpc>
                 <a:spcPct val="115000"/>
               </a:lnSpc>
               <a:buNone/>
@@ -3923,12 +4099,352 @@
               <a:buNone/>
             </a:pPr>
             <a:r>
+              <a:rPr lang="en-US" sz="1800" dirty="0">
+                <a:solidFill>
+                  <a:srgbClr val="000000"/>
+                </a:solidFill>
+              </a:rPr>
+              <a:t>内存图：pages四格、price八格连成一片标bk，起点编号就是&amp;bk的值</a:t>
+            </a:r>
+            <a:endParaRPr lang="en-US" sz="1800" dirty="0"/>
+          </a:p>
+        </p:txBody>
+      </p:sp>
+      <p:sp>
+        <p:nvSpPr>
+          <p:cNvPr id="9" name="Text 7"/>
+          <p:cNvSpPr/>
+          <p:nvPr/>
+        </p:nvSpPr>
+        <p:spPr>
+          <a:xfrm>
+            <a:off x="896112" y="5289804"/>
+            <a:ext cx="10454335" cy="397764"/>
+          </a:xfrm>
+          <a:prstGeom prst="rect">
+            <a:avLst/>
+          </a:prstGeom>
+          <a:noFill/>
+          <a:ln/>
+        </p:spPr>
+        <p:txBody>
+          <a:bodyPr wrap="square" rtlCol="0" anchor="t"/>
+          <a:lstStyle/>
+          <a:p>
+            <a:pPr algn="l" indent="0" marL="0">
+              <a:lnSpc>
+                <a:spcPct val="115000"/>
+              </a:lnSpc>
+              <a:buNone/>
+            </a:pPr>
+            <a:r>
               <a:rPr lang="en-US" sz="1800" b="1" dirty="0">
                 <a:solidFill>
+                  <a:srgbClr val="1F4E9C"/>
+                </a:solidFill>
+                <a:latin typeface="微软雅黑" pitchFamily="34" charset="0"/>
+                <a:ea typeface="微软雅黑" pitchFamily="34" charset="-122"/>
+                <a:cs typeface="微软雅黑" pitchFamily="34" charset="-120"/>
+              </a:rPr>
+              <a:t>•  </a:t>
+            </a:r>
+            <a:pPr algn="l" indent="0" marL="0">
+              <a:lnSpc>
+                <a:spcPct val="115000"/>
+              </a:lnSpc>
+              <a:buNone/>
+            </a:pPr>
+            <a:r>
+              <a:rPr lang="en-US" sz="1800" dirty="0">
+                <a:solidFill>
                   <a:srgbClr val="000000"/>
                 </a:solidFill>
               </a:rPr>
-              <a:t>跟练题</a:t>
+              <a:t>初始化按成员声明顺序对号入座，定义末尾分号不能丢</a:t>
+            </a:r>
+            <a:endParaRPr lang="en-US" sz="1800" dirty="0"/>
+          </a:p>
+        </p:txBody>
+      </p:sp>
+    </p:spTree>
+  </p:cSld>
+  <p:clrMapOvr>
+    <a:masterClrMapping/>
+  </p:clrMapOvr>
+</p:sld>
+</file>
+
+<file path=ppt/slides/slide15.xml><?xml version="1.0" encoding="utf-8"?>
+<p:sld xmlns:a="http://schemas.openxmlformats.org/drawingml/2006/main" xmlns:r="http://schemas.openxmlformats.org/officeDocument/2006/relationships" xmlns:p="http://schemas.openxmlformats.org/presentationml/2006/main">
+  <p:cSld name="Slide 15">
+    <p:bg>
+      <p:bgPr>
+        <a:blipFill dpi="0" rotWithShape="1">
+          <a:blip r:embed="rId1">
+            <a:lum/>
+          </a:blip>
+          <a:srcRect/>
+          <a:stretch>
+            <a:fillRect/>
+          </a:stretch>
+        </a:blipFill>
+        <a:effectLst/>
+      </p:bgPr>
+    </p:bg>
+    <p:spTree>
+      <p:nvGrpSpPr>
+        <p:cNvPr id="1" name=""/>
+        <p:cNvGrpSpPr/>
+        <p:nvPr/>
+      </p:nvGrpSpPr>
+      <p:grpSpPr>
+        <a:xfrm>
+          <a:off x="0" y="0"/>
+          <a:ext cx="0" cy="0"/>
+          <a:chOff x="0" y="0"/>
+          <a:chExt cx="0" cy="0"/>
+        </a:xfrm>
+      </p:grpSpPr>
+      <p:sp>
+        <p:nvSpPr>
+          <p:cNvPr id="2" name="Text 0"/>
+          <p:cNvSpPr/>
+          <p:nvPr/>
+        </p:nvSpPr>
+        <p:spPr>
+          <a:xfrm>
+            <a:off x="10362895" y="6016752"/>
+            <a:ext cx="1463040" cy="320040"/>
+          </a:xfrm>
+          <a:prstGeom prst="rect">
+            <a:avLst/>
+          </a:prstGeom>
+          <a:noFill/>
+          <a:ln/>
+        </p:spPr>
+        <p:txBody>
+          <a:bodyPr wrap="square" rtlCol="0" anchor="ctr"/>
+          <a:lstStyle/>
+          <a:p>
+            <a:pPr algn="r" indent="0" marL="0">
+              <a:buNone/>
+            </a:pPr>
+            <a:r>
+              <a:rPr lang="en-US" sz="1000" dirty="0">
+                <a:solidFill>
+                  <a:srgbClr val="8A9099"/>
+                </a:solidFill>
+                <a:latin typeface="微软雅黑" pitchFamily="34" charset="0"/>
+                <a:ea typeface="微软雅黑" pitchFamily="34" charset="-122"/>
+                <a:cs typeface="微软雅黑" pitchFamily="34" charset="-120"/>
+              </a:rPr>
+              <a:t>15 / 15</a:t>
+            </a:r>
+            <a:endParaRPr lang="en-US" sz="1000" dirty="0"/>
+          </a:p>
+        </p:txBody>
+      </p:sp>
+      <p:sp>
+        <p:nvSpPr>
+          <p:cNvPr id="3" name="Text 1"/>
+          <p:cNvSpPr/>
+          <p:nvPr/>
+        </p:nvSpPr>
+        <p:spPr>
+          <a:xfrm>
+            <a:off x="822960" y="960120"/>
+            <a:ext cx="10545775" cy="365760"/>
+          </a:xfrm>
+          <a:prstGeom prst="rect">
+            <a:avLst/>
+          </a:prstGeom>
+          <a:noFill/>
+          <a:ln/>
+        </p:spPr>
+        <p:txBody>
+          <a:bodyPr wrap="square" rtlCol="0" anchor="ctr"/>
+          <a:lstStyle/>
+          <a:p>
+            <a:pPr algn="l" indent="0" marL="0">
+              <a:buNone/>
+            </a:pPr>
+            <a:r>
+              <a:rPr lang="en-US" sz="1400" b="1" dirty="0">
+                <a:solidFill>
+                  <a:srgbClr val="1F4E9C"/>
+                </a:solidFill>
+                <a:latin typeface="微软雅黑" pitchFamily="34" charset="0"/>
+                <a:ea typeface="微软雅黑" pitchFamily="34" charset="-122"/>
+                <a:cs typeface="微软雅黑" pitchFamily="34" charset="-120"/>
+              </a:rPr>
+              <a:t>参考答案 · 模仿题</a:t>
+            </a:r>
+            <a:endParaRPr lang="en-US" sz="1400" dirty="0"/>
+          </a:p>
+        </p:txBody>
+      </p:sp>
+      <p:sp>
+        <p:nvSpPr>
+          <p:cNvPr id="4" name="Text 2"/>
+          <p:cNvSpPr/>
+          <p:nvPr/>
+        </p:nvSpPr>
+        <p:spPr>
+          <a:xfrm>
+            <a:off x="822960" y="1344168"/>
+            <a:ext cx="10545775" cy="731520"/>
+          </a:xfrm>
+          <a:prstGeom prst="rect">
+            <a:avLst/>
+          </a:prstGeom>
+          <a:noFill/>
+          <a:ln/>
+        </p:spPr>
+        <p:txBody>
+          <a:bodyPr wrap="square" rtlCol="0" anchor="ctr"/>
+          <a:lstStyle/>
+          <a:p>
+            <a:pPr algn="l" indent="0" marL="0">
+              <a:buNone/>
+            </a:pPr>
+            <a:r>
+              <a:rPr lang="en-US" sz="2800" b="1" dirty="0">
+                <a:solidFill>
+                  <a:srgbClr val="1F2329"/>
+                </a:solidFill>
+                <a:latin typeface="微软雅黑" pitchFamily="34" charset="0"/>
+                <a:ea typeface="微软雅黑" pitchFamily="34" charset="-122"/>
+                <a:cs typeface="微软雅黑" pitchFamily="34" charset="-120"/>
+              </a:rPr>
+              <a:t>模仿题参考答案（自行对照）</a:t>
+            </a:r>
+            <a:endParaRPr lang="en-US" sz="2800" dirty="0"/>
+          </a:p>
+        </p:txBody>
+      </p:sp>
+      <p:sp>
+        <p:nvSpPr>
+          <p:cNvPr id="5" name="Shape 3"/>
+          <p:cNvSpPr/>
+          <p:nvPr/>
+        </p:nvSpPr>
+        <p:spPr>
+          <a:xfrm>
+            <a:off x="822960" y="2395728"/>
+            <a:ext cx="10545775" cy="1508760"/>
+          </a:xfrm>
+          <a:prstGeom prst="rect">
+            <a:avLst/>
+          </a:prstGeom>
+          <a:solidFill>
+            <a:srgbClr val="F7F9FC"/>
+          </a:solidFill>
+          <a:ln/>
+        </p:spPr>
+      </p:sp>
+      <p:sp>
+        <p:nvSpPr>
+          <p:cNvPr id="6" name="Shape 4"/>
+          <p:cNvSpPr/>
+          <p:nvPr/>
+        </p:nvSpPr>
+        <p:spPr>
+          <a:xfrm>
+            <a:off x="822960" y="2395728"/>
+            <a:ext cx="50292" cy="1508760"/>
+          </a:xfrm>
+          <a:prstGeom prst="rect">
+            <a:avLst/>
+          </a:prstGeom>
+          <a:solidFill>
+            <a:srgbClr val="1F4E9C"/>
+          </a:solidFill>
+          <a:ln/>
+        </p:spPr>
+      </p:sp>
+      <p:sp>
+        <p:nvSpPr>
+          <p:cNvPr id="7" name="Text 5"/>
+          <p:cNvSpPr/>
+          <p:nvPr/>
+        </p:nvSpPr>
+        <p:spPr>
+          <a:xfrm>
+            <a:off x="1078992" y="2505456"/>
+            <a:ext cx="10033711" cy="1289304"/>
+          </a:xfrm>
+          <a:prstGeom prst="rect">
+            <a:avLst/>
+          </a:prstGeom>
+          <a:noFill/>
+          <a:ln/>
+        </p:spPr>
+        <p:txBody>
+          <a:bodyPr wrap="square" rtlCol="0" anchor="t"/>
+          <a:lstStyle/>
+          <a:p>
+            <a:pPr algn="l" indent="0" marL="0">
+              <a:lnSpc>
+                <a:spcPct val="125000"/>
+              </a:lnSpc>
+              <a:buNone/>
+            </a:pPr>
+            <a:r>
+              <a:rPr lang="en-US" sz="1400" dirty="0">
+                <a:solidFill>
+                  <a:srgbClr val="1F2329"/>
+                </a:solidFill>
+                <a:latin typeface="Consolas" pitchFamily="34" charset="0"/>
+                <a:ea typeface="Consolas" pitchFamily="34" charset="-122"/>
+                <a:cs typeface="Consolas" pitchFamily="34" charset="-120"/>
+              </a:rPr>
+              <a:t>// (*p).pages 与 p-&gt;pages 等价
+struct Book *p = &amp;bk;
+printf("%d\n", (*p).pages);   // 320
+printf("%d\n", p-&gt;pages);     // 320
+</a:t>
+            </a:r>
+            <a:endParaRPr lang="en-US" sz="1400" dirty="0"/>
+          </a:p>
+        </p:txBody>
+      </p:sp>
+      <p:sp>
+        <p:nvSpPr>
+          <p:cNvPr id="8" name="Text 6"/>
+          <p:cNvSpPr/>
+          <p:nvPr/>
+        </p:nvSpPr>
+        <p:spPr>
+          <a:xfrm>
+            <a:off x="896112" y="4105656"/>
+            <a:ext cx="10454335" cy="397764"/>
+          </a:xfrm>
+          <a:prstGeom prst="rect">
+            <a:avLst/>
+          </a:prstGeom>
+          <a:noFill/>
+          <a:ln/>
+        </p:spPr>
+        <p:txBody>
+          <a:bodyPr wrap="square" rtlCol="0" anchor="t"/>
+          <a:lstStyle/>
+          <a:p>
+            <a:pPr algn="l" indent="0" marL="0">
+              <a:lnSpc>
+                <a:spcPct val="115000"/>
+              </a:lnSpc>
+              <a:buNone/>
+            </a:pPr>
+            <a:r>
+              <a:rPr lang="en-US" sz="1800" b="1" dirty="0">
+                <a:solidFill>
+                  <a:srgbClr val="1F4E9C"/>
+                </a:solidFill>
+                <a:latin typeface="微软雅黑" pitchFamily="34" charset="0"/>
+                <a:ea typeface="微软雅黑" pitchFamily="34" charset="-122"/>
+                <a:cs typeface="微软雅黑" pitchFamily="34" charset="-120"/>
+              </a:rPr>
+              <a:t>•  </a:t>
             </a:r>
             <a:pPr algn="l" indent="0" marL="0">
               <a:lnSpc>
@@ -3942,7 +4458,7 @@
                   <a:srgbClr val="000000"/>
                 </a:solidFill>
               </a:rPr>
-              <a:t>：定义struct Book（int pages; double price），造一个变量并初始化，用点号打印两个成员，再画内存图</a:t>
+              <a:t>两次打印结果必须相同，不同就是括号或箭头写错了</a:t>
             </a:r>
             <a:endParaRPr lang="en-US" sz="1800" dirty="0"/>
           </a:p>
@@ -3950,14 +4466,14 @@
       </p:sp>
       <p:sp>
         <p:nvSpPr>
-          <p:cNvPr id="6" name="Text 4"/>
-          <p:cNvSpPr/>
-          <p:nvPr/>
-        </p:nvSpPr>
-        <p:spPr>
-          <a:xfrm>
-            <a:off x="896112" y="3209544"/>
-            <a:ext cx="10454335" cy="740664"/>
+          <p:cNvPr id="9" name="Text 7"/>
+          <p:cNvSpPr/>
+          <p:nvPr/>
+        </p:nvSpPr>
+        <p:spPr>
+          <a:xfrm>
+            <a:off x="896112" y="4576572"/>
+            <a:ext cx="10454335" cy="397764"/>
           </a:xfrm>
           <a:prstGeom prst="rect">
             <a:avLst/>
@@ -3993,123 +4509,70 @@
               <a:buNone/>
             </a:pPr>
             <a:r>
+              <a:rPr lang="en-US" sz="1800" dirty="0">
+                <a:solidFill>
+                  <a:srgbClr val="000000"/>
+                </a:solidFill>
+              </a:rPr>
+              <a:t>常见错法：写成*p.pages，点号优先级更高，编译报错</a:t>
+            </a:r>
+            <a:endParaRPr lang="en-US" sz="1800" dirty="0"/>
+          </a:p>
+        </p:txBody>
+      </p:sp>
+      <p:sp>
+        <p:nvSpPr>
+          <p:cNvPr id="10" name="Text 8"/>
+          <p:cNvSpPr/>
+          <p:nvPr/>
+        </p:nvSpPr>
+        <p:spPr>
+          <a:xfrm>
+            <a:off x="896112" y="5047488"/>
+            <a:ext cx="10454335" cy="397764"/>
+          </a:xfrm>
+          <a:prstGeom prst="rect">
+            <a:avLst/>
+          </a:prstGeom>
+          <a:noFill/>
+          <a:ln/>
+        </p:spPr>
+        <p:txBody>
+          <a:bodyPr wrap="square" rtlCol="0" anchor="t"/>
+          <a:lstStyle/>
+          <a:p>
+            <a:pPr algn="l" indent="0" marL="0">
+              <a:lnSpc>
+                <a:spcPct val="115000"/>
+              </a:lnSpc>
+              <a:buNone/>
+            </a:pPr>
+            <a:r>
               <a:rPr lang="en-US" sz="1800" b="1" dirty="0">
                 <a:solidFill>
+                  <a:srgbClr val="1F4E9C"/>
+                </a:solidFill>
+                <a:latin typeface="微软雅黑" pitchFamily="34" charset="0"/>
+                <a:ea typeface="微软雅黑" pitchFamily="34" charset="-122"/>
+                <a:cs typeface="微软雅黑" pitchFamily="34" charset="-120"/>
+              </a:rPr>
+              <a:t>•  </a:t>
+            </a:r>
+            <a:pPr algn="l" indent="0" marL="0">
+              <a:lnSpc>
+                <a:spcPct val="115000"/>
+              </a:lnSpc>
+              <a:buNone/>
+            </a:pPr>
+            <a:r>
+              <a:rPr lang="en-US" sz="1800" dirty="0">
+                <a:solidFill>
                   <a:srgbClr val="000000"/>
                 </a:solidFill>
               </a:rPr>
-              <a:t>模仿题</a:t>
-            </a:r>
-            <a:pPr algn="l" indent="0" marL="0">
-              <a:lnSpc>
-                <a:spcPct val="115000"/>
-              </a:lnSpc>
-              <a:buNone/>
-            </a:pPr>
-            <a:r>
-              <a:rPr lang="en-US" sz="1800" dirty="0">
-                <a:solidFill>
-                  <a:srgbClr val="000000"/>
-                </a:solidFill>
-              </a:rPr>
-              <a:t>：声明struct Book *p指向它，分别用(*p).pages和p-&gt;pages打印，确认结果一样</a:t>
+              <a:t>代码省略#include &lt;stdio.h&gt;与main骨架</a:t>
             </a:r>
             <a:endParaRPr lang="en-US" sz="1800" dirty="0"/>
-          </a:p>
-        </p:txBody>
-      </p:sp>
-      <p:sp>
-        <p:nvSpPr>
-          <p:cNvPr id="7" name="Text 5"/>
-          <p:cNvSpPr/>
-          <p:nvPr/>
-        </p:nvSpPr>
-        <p:spPr>
-          <a:xfrm>
-            <a:off x="896112" y="4023360"/>
-            <a:ext cx="10454335" cy="397764"/>
-          </a:xfrm>
-          <a:prstGeom prst="rect">
-            <a:avLst/>
-          </a:prstGeom>
-          <a:noFill/>
-          <a:ln/>
-        </p:spPr>
-        <p:txBody>
-          <a:bodyPr wrap="square" rtlCol="0" anchor="t"/>
-          <a:lstStyle/>
-          <a:p>
-            <a:pPr algn="l" indent="0" marL="0">
-              <a:lnSpc>
-                <a:spcPct val="115000"/>
-              </a:lnSpc>
-              <a:buNone/>
-            </a:pPr>
-            <a:r>
-              <a:rPr lang="en-US" sz="1800" b="1" dirty="0">
-                <a:solidFill>
-                  <a:srgbClr val="1F4E9C"/>
-                </a:solidFill>
-                <a:latin typeface="微软雅黑" pitchFamily="34" charset="0"/>
-                <a:ea typeface="微软雅黑" pitchFamily="34" charset="-122"/>
-                <a:cs typeface="微软雅黑" pitchFamily="34" charset="-120"/>
-              </a:rPr>
-              <a:t>•  </a:t>
-            </a:r>
-            <a:pPr algn="l" indent="0" marL="0">
-              <a:lnSpc>
-                <a:spcPct val="115000"/>
-              </a:lnSpc>
-              <a:buNone/>
-            </a:pPr>
-            <a:r>
-              <a:rPr lang="en-US" sz="1800" dirty="0">
-                <a:solidFill>
-                  <a:srgbClr val="000000"/>
-                </a:solidFill>
-              </a:rPr>
-              <a:t>要求：合上资料默写结构体定义与p-&gt;age；两道题先纸上后上机</a:t>
-            </a:r>
-            <a:endParaRPr lang="en-US" sz="1800" dirty="0"/>
-          </a:p>
-        </p:txBody>
-      </p:sp>
-      <p:sp>
-        <p:nvSpPr>
-          <p:cNvPr id="8" name="Text 6"/>
-          <p:cNvSpPr/>
-          <p:nvPr/>
-        </p:nvSpPr>
-        <p:spPr>
-          <a:xfrm>
-            <a:off x="822960" y="4585716"/>
-            <a:ext cx="10545775" cy="358902"/>
-          </a:xfrm>
-          <a:prstGeom prst="rect">
-            <a:avLst/>
-          </a:prstGeom>
-          <a:noFill/>
-          <a:ln/>
-        </p:spPr>
-        <p:txBody>
-          <a:bodyPr wrap="square" rtlCol="0" anchor="t"/>
-          <a:lstStyle/>
-          <a:p>
-            <a:pPr algn="l" indent="0" marL="0">
-              <a:buNone/>
-            </a:pPr>
-            <a:r>
-              <a:rPr lang="en-US" sz="1500" dirty="0">
-                <a:solidFill>
-                  <a:srgbClr val="8A9099"/>
-                </a:solidFill>
-                <a:latin typeface="微软雅黑" pitchFamily="34" charset="0"/>
-                <a:ea typeface="微软雅黑" pitchFamily="34" charset="-122"/>
-                <a:cs typeface="微软雅黑" pitchFamily="34" charset="-120"/>
-              </a:rPr>
-              <a:t>参考答案在讲稿附录一</a:t>
-            </a:r>
-            <a:endParaRPr lang="en-US" sz="1500" dirty="0"/>
           </a:p>
         </p:txBody>
       </p:sp>
@@ -4185,7 +4648,7 @@
                 <a:ea typeface="微软雅黑" pitchFamily="34" charset="-122"/>
                 <a:cs typeface="微软雅黑" pitchFamily="34" charset="-120"/>
               </a:rPr>
-              <a:t>2 / 14</a:t>
+              <a:t>2 / 15</a:t>
             </a:r>
             <a:endParaRPr lang="en-US" sz="1000" dirty="0"/>
           </a:p>
@@ -4284,19 +4747,34 @@
             <a:avLst/>
           </a:prstGeom>
           <a:solidFill>
-            <a:srgbClr val="F5F6F7"/>
+            <a:srgbClr val="F7F9FC"/>
           </a:solidFill>
-          <a:ln w="9525">
-            <a:solidFill>
-              <a:srgbClr val="D8DBE0"/>
-            </a:solidFill>
-            <a:prstDash val="solid"/>
-          </a:ln>
-        </p:spPr>
-      </p:sp>
-      <p:sp>
-        <p:nvSpPr>
-          <p:cNvPr id="6" name="Text 4"/>
+          <a:ln/>
+        </p:spPr>
+      </p:sp>
+      <p:sp>
+        <p:nvSpPr>
+          <p:cNvPr id="6" name="Shape 4"/>
+          <p:cNvSpPr/>
+          <p:nvPr/>
+        </p:nvSpPr>
+        <p:spPr>
+          <a:xfrm>
+            <a:off x="822960" y="2395728"/>
+            <a:ext cx="50292" cy="1271016"/>
+          </a:xfrm>
+          <a:prstGeom prst="rect">
+            <a:avLst/>
+          </a:prstGeom>
+          <a:solidFill>
+            <a:srgbClr val="1F4E9C"/>
+          </a:solidFill>
+          <a:ln/>
+        </p:spPr>
+      </p:sp>
+      <p:sp>
+        <p:nvSpPr>
+          <p:cNvPr id="7" name="Text 5"/>
           <p:cNvSpPr/>
           <p:nvPr/>
         </p:nvSpPr>
@@ -4341,7 +4819,7 @@
       </p:sp>
       <p:sp>
         <p:nvSpPr>
-          <p:cNvPr id="7" name="Text 5"/>
+          <p:cNvPr id="8" name="Text 6"/>
           <p:cNvSpPr/>
           <p:nvPr/>
         </p:nvSpPr>
@@ -4397,7 +4875,7 @@
       </p:sp>
       <p:sp>
         <p:nvSpPr>
-          <p:cNvPr id="8" name="Text 6"/>
+          <p:cNvPr id="9" name="Text 7"/>
           <p:cNvSpPr/>
           <p:nvPr/>
         </p:nvSpPr>
@@ -4453,7 +4931,7 @@
       </p:sp>
       <p:sp>
         <p:nvSpPr>
-          <p:cNvPr id="9" name="Text 7"/>
+          <p:cNvPr id="10" name="Text 8"/>
           <p:cNvSpPr/>
           <p:nvPr/>
         </p:nvSpPr>
@@ -4593,7 +5071,7 @@
                 <a:ea typeface="微软雅黑" pitchFamily="34" charset="-122"/>
                 <a:cs typeface="微软雅黑" pitchFamily="34" charset="-120"/>
               </a:rPr>
-              <a:t>3 / 14</a:t>
+              <a:t>3 / 15</a:t>
             </a:r>
             <a:endParaRPr lang="en-US" sz="1000" dirty="0"/>
           </a:p>
@@ -4692,19 +5170,34 @@
             <a:avLst/>
           </a:prstGeom>
           <a:solidFill>
-            <a:srgbClr val="F5F6F7"/>
+            <a:srgbClr val="F7F9FC"/>
           </a:solidFill>
-          <a:ln w="9525">
-            <a:solidFill>
-              <a:srgbClr val="D8DBE0"/>
-            </a:solidFill>
-            <a:prstDash val="solid"/>
-          </a:ln>
-        </p:spPr>
-      </p:sp>
-      <p:sp>
-        <p:nvSpPr>
-          <p:cNvPr id="6" name="Text 4"/>
+          <a:ln/>
+        </p:spPr>
+      </p:sp>
+      <p:sp>
+        <p:nvSpPr>
+          <p:cNvPr id="6" name="Shape 4"/>
+          <p:cNvSpPr/>
+          <p:nvPr/>
+        </p:nvSpPr>
+        <p:spPr>
+          <a:xfrm>
+            <a:off x="822960" y="2395728"/>
+            <a:ext cx="50292" cy="1508760"/>
+          </a:xfrm>
+          <a:prstGeom prst="rect">
+            <a:avLst/>
+          </a:prstGeom>
+          <a:solidFill>
+            <a:srgbClr val="1F4E9C"/>
+          </a:solidFill>
+          <a:ln/>
+        </p:spPr>
+      </p:sp>
+      <p:sp>
+        <p:nvSpPr>
+          <p:cNvPr id="7" name="Text 5"/>
           <p:cNvSpPr/>
           <p:nvPr/>
         </p:nvSpPr>
@@ -4750,7 +5243,7 @@
       </p:sp>
       <p:sp>
         <p:nvSpPr>
-          <p:cNvPr id="7" name="Text 5"/>
+          <p:cNvPr id="8" name="Text 6"/>
           <p:cNvSpPr/>
           <p:nvPr/>
         </p:nvSpPr>
@@ -4806,7 +5299,7 @@
       </p:sp>
       <p:sp>
         <p:nvSpPr>
-          <p:cNvPr id="8" name="Text 6"/>
+          <p:cNvPr id="9" name="Text 7"/>
           <p:cNvSpPr/>
           <p:nvPr/>
         </p:nvSpPr>
@@ -4890,7 +5383,7 @@
       </p:sp>
       <p:sp>
         <p:nvSpPr>
-          <p:cNvPr id="9" name="Text 7"/>
+          <p:cNvPr id="10" name="Text 8"/>
           <p:cNvSpPr/>
           <p:nvPr/>
         </p:nvSpPr>
@@ -5016,7 +5509,7 @@
                 <a:ea typeface="微软雅黑" pitchFamily="34" charset="-122"/>
                 <a:cs typeface="微软雅黑" pitchFamily="34" charset="-120"/>
               </a:rPr>
-              <a:t>4 / 14</a:t>
+              <a:t>4 / 15</a:t>
             </a:r>
             <a:endParaRPr lang="en-US" sz="1000" dirty="0"/>
           </a:p>
@@ -5115,19 +5608,34 @@
             <a:avLst/>
           </a:prstGeom>
           <a:solidFill>
-            <a:srgbClr val="F5F6F7"/>
+            <a:srgbClr val="F7F9FC"/>
           </a:solidFill>
-          <a:ln w="9525">
-            <a:solidFill>
-              <a:srgbClr val="D8DBE0"/>
-            </a:solidFill>
-            <a:prstDash val="solid"/>
-          </a:ln>
-        </p:spPr>
-      </p:sp>
-      <p:sp>
-        <p:nvSpPr>
-          <p:cNvPr id="6" name="Text 4"/>
+          <a:ln/>
+        </p:spPr>
+      </p:sp>
+      <p:sp>
+        <p:nvSpPr>
+          <p:cNvPr id="6" name="Shape 4"/>
+          <p:cNvSpPr/>
+          <p:nvPr/>
+        </p:nvSpPr>
+        <p:spPr>
+          <a:xfrm>
+            <a:off x="822960" y="2395728"/>
+            <a:ext cx="50292" cy="1271016"/>
+          </a:xfrm>
+          <a:prstGeom prst="rect">
+            <a:avLst/>
+          </a:prstGeom>
+          <a:solidFill>
+            <a:srgbClr val="1F4E9C"/>
+          </a:solidFill>
+          <a:ln/>
+        </p:spPr>
+      </p:sp>
+      <p:sp>
+        <p:nvSpPr>
+          <p:cNvPr id="7" name="Text 5"/>
           <p:cNvSpPr/>
           <p:nvPr/>
         </p:nvSpPr>
@@ -5172,7 +5680,7 @@
       </p:sp>
       <p:sp>
         <p:nvSpPr>
-          <p:cNvPr id="7" name="Text 5"/>
+          <p:cNvPr id="8" name="Text 6"/>
           <p:cNvSpPr/>
           <p:nvPr/>
         </p:nvSpPr>
@@ -5228,7 +5736,7 @@
       </p:sp>
       <p:sp>
         <p:nvSpPr>
-          <p:cNvPr id="8" name="Text 6"/>
+          <p:cNvPr id="9" name="Text 7"/>
           <p:cNvSpPr/>
           <p:nvPr/>
         </p:nvSpPr>
@@ -5284,7 +5792,7 @@
       </p:sp>
       <p:sp>
         <p:nvSpPr>
-          <p:cNvPr id="9" name="Text 7"/>
+          <p:cNvPr id="10" name="Text 8"/>
           <p:cNvSpPr/>
           <p:nvPr/>
         </p:nvSpPr>
@@ -5410,7 +5918,7 @@
                 <a:ea typeface="微软雅黑" pitchFamily="34" charset="-122"/>
                 <a:cs typeface="微软雅黑" pitchFamily="34" charset="-120"/>
               </a:rPr>
-              <a:t>5 / 14</a:t>
+              <a:t>5 / 15</a:t>
             </a:r>
             <a:endParaRPr lang="en-US" sz="1000" dirty="0"/>
           </a:p>
@@ -5762,7 +6270,7 @@
                 <a:ea typeface="微软雅黑" pitchFamily="34" charset="-122"/>
                 <a:cs typeface="微软雅黑" pitchFamily="34" charset="-120"/>
               </a:rPr>
-              <a:t>6 / 14</a:t>
+              <a:t>6 / 15</a:t>
             </a:r>
             <a:endParaRPr lang="en-US" sz="1000" dirty="0"/>
           </a:p>
@@ -5861,19 +6369,34 @@
             <a:avLst/>
           </a:prstGeom>
           <a:solidFill>
-            <a:srgbClr val="F5F6F7"/>
+            <a:srgbClr val="F7F9FC"/>
           </a:solidFill>
-          <a:ln w="9525">
-            <a:solidFill>
-              <a:srgbClr val="D8DBE0"/>
-            </a:solidFill>
-            <a:prstDash val="solid"/>
-          </a:ln>
-        </p:spPr>
-      </p:sp>
-      <p:sp>
-        <p:nvSpPr>
-          <p:cNvPr id="6" name="Text 4"/>
+          <a:ln/>
+        </p:spPr>
+      </p:sp>
+      <p:sp>
+        <p:nvSpPr>
+          <p:cNvPr id="6" name="Shape 4"/>
+          <p:cNvSpPr/>
+          <p:nvPr/>
+        </p:nvSpPr>
+        <p:spPr>
+          <a:xfrm>
+            <a:off x="822960" y="2395728"/>
+            <a:ext cx="50292" cy="1033272"/>
+          </a:xfrm>
+          <a:prstGeom prst="rect">
+            <a:avLst/>
+          </a:prstGeom>
+          <a:solidFill>
+            <a:srgbClr val="1F4E9C"/>
+          </a:solidFill>
+          <a:ln/>
+        </p:spPr>
+      </p:sp>
+      <p:sp>
+        <p:nvSpPr>
+          <p:cNvPr id="7" name="Text 5"/>
           <p:cNvSpPr/>
           <p:nvPr/>
         </p:nvSpPr>
@@ -5917,7 +6440,7 @@
       </p:sp>
       <p:sp>
         <p:nvSpPr>
-          <p:cNvPr id="7" name="Text 5"/>
+          <p:cNvPr id="8" name="Text 6"/>
           <p:cNvSpPr/>
           <p:nvPr/>
         </p:nvSpPr>
@@ -5973,7 +6496,7 @@
       </p:sp>
       <p:sp>
         <p:nvSpPr>
-          <p:cNvPr id="8" name="Text 6"/>
+          <p:cNvPr id="9" name="Text 7"/>
           <p:cNvSpPr/>
           <p:nvPr/>
         </p:nvSpPr>
@@ -6029,7 +6552,7 @@
       </p:sp>
       <p:sp>
         <p:nvSpPr>
-          <p:cNvPr id="9" name="Text 7"/>
+          <p:cNvPr id="10" name="Text 8"/>
           <p:cNvSpPr/>
           <p:nvPr/>
         </p:nvSpPr>
@@ -6155,7 +6678,7 @@
                 <a:ea typeface="微软雅黑" pitchFamily="34" charset="-122"/>
                 <a:cs typeface="微软雅黑" pitchFamily="34" charset="-120"/>
               </a:rPr>
-              <a:t>7 / 14</a:t>
+              <a:t>7 / 15</a:t>
             </a:r>
             <a:endParaRPr lang="en-US" sz="1000" dirty="0"/>
           </a:p>
@@ -6194,7 +6717,7 @@
                 <a:ea typeface="微软雅黑" pitchFamily="34" charset="-122"/>
                 <a:cs typeface="微软雅黑" pitchFamily="34" charset="-120"/>
               </a:rPr>
-              <a:t>板书推演</a:t>
+              <a:t>结构体指针</a:t>
             </a:r>
             <a:endParaRPr lang="en-US" sz="1400" dirty="0"/>
           </a:p>
@@ -6233,7 +6756,7 @@
                 <a:ea typeface="微软雅黑" pitchFamily="34" charset="-122"/>
                 <a:cs typeface="微软雅黑" pitchFamily="34" charset="-120"/>
               </a:rPr>
-              <a:t>画结构体的内存图</a:t>
+              <a:t>结构体也有地址：&amp;stu与指向它的指针</a:t>
             </a:r>
             <a:endParaRPr lang="en-US" sz="2800" dirty="0"/>
           </a:p>
@@ -6241,14 +6764,54 @@
       </p:sp>
       <p:sp>
         <p:nvSpPr>
-          <p:cNvPr id="5" name="Text 3"/>
-          <p:cNvSpPr/>
-          <p:nvPr/>
-        </p:nvSpPr>
-        <p:spPr>
-          <a:xfrm>
-            <a:off x="822960" y="2194560"/>
-            <a:ext cx="10545775" cy="685800"/>
+          <p:cNvPr id="5" name="Shape 3"/>
+          <p:cNvSpPr/>
+          <p:nvPr/>
+        </p:nvSpPr>
+        <p:spPr>
+          <a:xfrm>
+            <a:off x="822960" y="2395728"/>
+            <a:ext cx="10545775" cy="1033272"/>
+          </a:xfrm>
+          <a:prstGeom prst="rect">
+            <a:avLst/>
+          </a:prstGeom>
+          <a:solidFill>
+            <a:srgbClr val="F7F9FC"/>
+          </a:solidFill>
+          <a:ln/>
+        </p:spPr>
+      </p:sp>
+      <p:sp>
+        <p:nvSpPr>
+          <p:cNvPr id="6" name="Shape 4"/>
+          <p:cNvSpPr/>
+          <p:nvPr/>
+        </p:nvSpPr>
+        <p:spPr>
+          <a:xfrm>
+            <a:off x="822960" y="2395728"/>
+            <a:ext cx="50292" cy="1033272"/>
+          </a:xfrm>
+          <a:prstGeom prst="rect">
+            <a:avLst/>
+          </a:prstGeom>
+          <a:solidFill>
+            <a:srgbClr val="1F4E9C"/>
+          </a:solidFill>
+          <a:ln/>
+        </p:spPr>
+      </p:sp>
+      <p:sp>
+        <p:nvSpPr>
+          <p:cNvPr id="7" name="Text 5"/>
+          <p:cNvSpPr/>
+          <p:nvPr/>
+        </p:nvSpPr>
+        <p:spPr>
+          <a:xfrm>
+            <a:off x="1078992" y="2505456"/>
+            <a:ext cx="10033711" cy="813816"/>
           </a:xfrm>
           <a:prstGeom prst="rect">
             <a:avLst/>
@@ -6261,84 +6824,221 @@
           <a:lstStyle/>
           <a:p>
             <a:pPr algn="l" indent="0" marL="0">
-              <a:buNone/>
-            </a:pPr>
-            <a:r>
-              <a:rPr lang="en-US" sz="1600" dirty="0">
+              <a:lnSpc>
+                <a:spcPct val="125000"/>
+              </a:lnSpc>
+              <a:buNone/>
+            </a:pPr>
+            <a:r>
+              <a:rPr lang="en-US" sz="1400" dirty="0">
                 <a:solidFill>
                   <a:srgbClr val="1F2329"/>
                 </a:solidFill>
-                <a:latin typeface="微软雅黑" pitchFamily="34" charset="0"/>
-                <a:ea typeface="微软雅黑" pitchFamily="34" charset="-122"/>
-                <a:cs typeface="微软雅黑" pitchFamily="34" charset="-120"/>
-              </a:rPr>
-              <a:t>任务：① 写struct Student的类型定义（age、score两个成员）；② 画stu的内存格子：age四格、score八格连成一片，标上名字与值；③ 写stu.age和stu.score的取值；④ 旁边画stu2 = stu后的第二片格子。不写程序骨架</a:t>
-            </a:r>
-            <a:endParaRPr lang="en-US" sz="1600" dirty="0"/>
-          </a:p>
-        </p:txBody>
-      </p:sp>
-      <p:sp>
-        <p:nvSpPr>
-          <p:cNvPr id="6" name="Shape 4"/>
-          <p:cNvSpPr/>
-          <p:nvPr/>
-        </p:nvSpPr>
-        <p:spPr>
-          <a:xfrm>
-            <a:off x="822960" y="3017520"/>
-            <a:ext cx="10545775" cy="2788920"/>
-          </a:xfrm>
-          <a:prstGeom prst="rect">
-            <a:avLst/>
-          </a:prstGeom>
-          <a:solidFill>
-            <a:srgbClr val="FFFFFF"/>
-          </a:solidFill>
-          <a:ln w="12700">
-            <a:solidFill>
-              <a:srgbClr val="B9C0C9"/>
-            </a:solidFill>
-            <a:prstDash val="dash"/>
-          </a:ln>
-        </p:spPr>
-      </p:sp>
-      <p:sp>
-        <p:nvSpPr>
-          <p:cNvPr id="7" name="Text 5"/>
-          <p:cNvSpPr/>
-          <p:nvPr/>
-        </p:nvSpPr>
-        <p:spPr>
-          <a:xfrm>
-            <a:off x="822960" y="5349240"/>
-            <a:ext cx="10545775" cy="365760"/>
-          </a:xfrm>
-          <a:prstGeom prst="rect">
-            <a:avLst/>
-          </a:prstGeom>
-          <a:noFill/>
-          <a:ln/>
-        </p:spPr>
-        <p:txBody>
-          <a:bodyPr wrap="square" rtlCol="0" anchor="ctr"/>
-          <a:lstStyle/>
-          <a:p>
-            <a:pPr algn="r" indent="0" marL="0">
-              <a:buNone/>
-            </a:pPr>
-            <a:r>
-              <a:rPr lang="en-US" sz="1200" dirty="0">
-                <a:solidFill>
-                  <a:srgbClr val="8A9099"/>
-                </a:solidFill>
-                <a:latin typeface="微软雅黑" pitchFamily="34" charset="0"/>
-                <a:ea typeface="微软雅黑" pitchFamily="34" charset="-122"/>
-                <a:cs typeface="微软雅黑" pitchFamily="34" charset="-120"/>
-              </a:rPr>
-              <a:t>此处板书推演</a:t>
-            </a:r>
-            <a:endParaRPr lang="en-US" sz="1200" dirty="0"/>
+                <a:latin typeface="Consolas" pitchFamily="34" charset="0"/>
+                <a:ea typeface="Consolas" pitchFamily="34" charset="-122"/>
+                <a:cs typeface="Consolas" pitchFamily="34" charset="-120"/>
+              </a:rPr>
+              <a:t>struct Student *p = &amp;stu;   // p指向stu
+printf("%d", (*p).age);     // 先取值再点成员，括号不能丢
+</a:t>
+            </a:r>
+            <a:endParaRPr lang="en-US" sz="1400" dirty="0"/>
+          </a:p>
+        </p:txBody>
+      </p:sp>
+      <p:sp>
+        <p:nvSpPr>
+          <p:cNvPr id="8" name="Text 6"/>
+          <p:cNvSpPr/>
+          <p:nvPr/>
+        </p:nvSpPr>
+        <p:spPr>
+          <a:xfrm>
+            <a:off x="896112" y="3630168"/>
+            <a:ext cx="10454335" cy="397764"/>
+          </a:xfrm>
+          <a:prstGeom prst="rect">
+            <a:avLst/>
+          </a:prstGeom>
+          <a:noFill/>
+          <a:ln/>
+        </p:spPr>
+        <p:txBody>
+          <a:bodyPr wrap="square" rtlCol="0" anchor="t"/>
+          <a:lstStyle/>
+          <a:p>
+            <a:pPr algn="l" indent="0" marL="0">
+              <a:lnSpc>
+                <a:spcPct val="115000"/>
+              </a:lnSpc>
+              <a:buNone/>
+            </a:pPr>
+            <a:r>
+              <a:rPr lang="en-US" sz="1800" b="1" dirty="0">
+                <a:solidFill>
+                  <a:srgbClr val="1F4E9C"/>
+                </a:solidFill>
+                <a:latin typeface="微软雅黑" pitchFamily="34" charset="0"/>
+                <a:ea typeface="微软雅黑" pitchFamily="34" charset="-122"/>
+                <a:cs typeface="微软雅黑" pitchFamily="34" charset="-120"/>
+              </a:rPr>
+              <a:t>•  </a:t>
+            </a:r>
+            <a:pPr algn="l" indent="0" marL="0">
+              <a:lnSpc>
+                <a:spcPct val="115000"/>
+              </a:lnSpc>
+              <a:buNone/>
+            </a:pPr>
+            <a:r>
+              <a:rPr lang="en-US" sz="1800" dirty="0">
+                <a:solidFill>
+                  <a:srgbClr val="000000"/>
+                </a:solidFill>
+              </a:rPr>
+              <a:t>指针的老规矩原样适用：&amp;取地址，*取值，p指向stu</a:t>
+            </a:r>
+            <a:endParaRPr lang="en-US" sz="1800" dirty="0"/>
+          </a:p>
+        </p:txBody>
+      </p:sp>
+      <p:sp>
+        <p:nvSpPr>
+          <p:cNvPr id="9" name="Text 7"/>
+          <p:cNvSpPr/>
+          <p:nvPr/>
+        </p:nvSpPr>
+        <p:spPr>
+          <a:xfrm>
+            <a:off x="896112" y="4101084"/>
+            <a:ext cx="10454335" cy="397764"/>
+          </a:xfrm>
+          <a:prstGeom prst="rect">
+            <a:avLst/>
+          </a:prstGeom>
+          <a:noFill/>
+          <a:ln/>
+        </p:spPr>
+        <p:txBody>
+          <a:bodyPr wrap="square" rtlCol="0" anchor="t"/>
+          <a:lstStyle/>
+          <a:p>
+            <a:pPr algn="l" indent="0" marL="0">
+              <a:lnSpc>
+                <a:spcPct val="115000"/>
+              </a:lnSpc>
+              <a:buNone/>
+            </a:pPr>
+            <a:r>
+              <a:rPr lang="en-US" sz="1800" b="1" dirty="0">
+                <a:solidFill>
+                  <a:srgbClr val="1F4E9C"/>
+                </a:solidFill>
+                <a:latin typeface="微软雅黑" pitchFamily="34" charset="0"/>
+                <a:ea typeface="微软雅黑" pitchFamily="34" charset="-122"/>
+                <a:cs typeface="微软雅黑" pitchFamily="34" charset="-120"/>
+              </a:rPr>
+              <a:t>•  </a:t>
+            </a:r>
+            <a:pPr algn="l" indent="0" marL="0">
+              <a:lnSpc>
+                <a:spcPct val="115000"/>
+              </a:lnSpc>
+              <a:buNone/>
+            </a:pPr>
+            <a:r>
+              <a:rPr lang="en-US" sz="1800" dirty="0">
+                <a:solidFill>
+                  <a:srgbClr val="000000"/>
+                </a:solidFill>
+              </a:rPr>
+              <a:t>(*p).age：先顺着p拿到stu，再取age；</a:t>
+            </a:r>
+            <a:pPr algn="l" indent="0" marL="0">
+              <a:lnSpc>
+                <a:spcPct val="115000"/>
+              </a:lnSpc>
+              <a:buNone/>
+            </a:pPr>
+            <a:r>
+              <a:rPr lang="en-US" sz="1800" b="1" dirty="0">
+                <a:solidFill>
+                  <a:srgbClr val="000000"/>
+                </a:solidFill>
+              </a:rPr>
+              <a:t>括号必须写</a:t>
+            </a:r>
+            <a:pPr algn="l" indent="0" marL="0">
+              <a:lnSpc>
+                <a:spcPct val="115000"/>
+              </a:lnSpc>
+              <a:buNone/>
+            </a:pPr>
+            <a:r>
+              <a:rPr lang="en-US" sz="1800" dirty="0">
+                <a:solidFill>
+                  <a:srgbClr val="000000"/>
+                </a:solidFill>
+              </a:rPr>
+              <a:t>，点号优先级更高</a:t>
+            </a:r>
+            <a:endParaRPr lang="en-US" sz="1800" dirty="0"/>
+          </a:p>
+        </p:txBody>
+      </p:sp>
+      <p:sp>
+        <p:nvSpPr>
+          <p:cNvPr id="10" name="Text 8"/>
+          <p:cNvSpPr/>
+          <p:nvPr/>
+        </p:nvSpPr>
+        <p:spPr>
+          <a:xfrm>
+            <a:off x="896112" y="4572000"/>
+            <a:ext cx="10454335" cy="397764"/>
+          </a:xfrm>
+          <a:prstGeom prst="rect">
+            <a:avLst/>
+          </a:prstGeom>
+          <a:noFill/>
+          <a:ln/>
+        </p:spPr>
+        <p:txBody>
+          <a:bodyPr wrap="square" rtlCol="0" anchor="t"/>
+          <a:lstStyle/>
+          <a:p>
+            <a:pPr algn="l" indent="0" marL="0">
+              <a:lnSpc>
+                <a:spcPct val="115000"/>
+              </a:lnSpc>
+              <a:buNone/>
+            </a:pPr>
+            <a:r>
+              <a:rPr lang="en-US" sz="1800" b="1" dirty="0">
+                <a:solidFill>
+                  <a:srgbClr val="1F4E9C"/>
+                </a:solidFill>
+                <a:latin typeface="微软雅黑" pitchFamily="34" charset="0"/>
+                <a:ea typeface="微软雅黑" pitchFamily="34" charset="-122"/>
+                <a:cs typeface="微软雅黑" pitchFamily="34" charset="-120"/>
+              </a:rPr>
+              <a:t>•  </a:t>
+            </a:r>
+            <a:pPr algn="l" indent="0" marL="0">
+              <a:lnSpc>
+                <a:spcPct val="115000"/>
+              </a:lnSpc>
+              <a:buNone/>
+            </a:pPr>
+            <a:r>
+              <a:rPr lang="en-US" sz="1800" dirty="0">
+                <a:solidFill>
+                  <a:srgbClr val="000000"/>
+                </a:solidFill>
+              </a:rPr>
+              <a:t>这套写法能用，但每次带括号太啰嗦，下一页给你简写</a:t>
+            </a:r>
+            <a:endParaRPr lang="en-US" sz="1800" dirty="0"/>
           </a:p>
         </p:txBody>
       </p:sp>
@@ -6414,7 +7114,7 @@
                 <a:ea typeface="微软雅黑" pitchFamily="34" charset="-122"/>
                 <a:cs typeface="微软雅黑" pitchFamily="34" charset="-120"/>
               </a:rPr>
-              <a:t>8 / 14</a:t>
+              <a:t>8 / 15</a:t>
             </a:r>
             <a:endParaRPr lang="en-US" sz="1000" dirty="0"/>
           </a:p>
@@ -6453,7 +7153,7 @@
                 <a:ea typeface="微软雅黑" pitchFamily="34" charset="-122"/>
                 <a:cs typeface="微软雅黑" pitchFamily="34" charset="-120"/>
               </a:rPr>
-              <a:t>结构体指针</a:t>
+              <a:t>箭头写法</a:t>
             </a:r>
             <a:endParaRPr lang="en-US" sz="1400" dirty="0"/>
           </a:p>
@@ -6492,7 +7192,7 @@
                 <a:ea typeface="微软雅黑" pitchFamily="34" charset="-122"/>
                 <a:cs typeface="微软雅黑" pitchFamily="34" charset="-120"/>
               </a:rPr>
-              <a:t>结构体也有地址：&amp;stu与指向它的指针</a:t>
+              <a:t>p-&gt;age：箭头是括号点号的简写</a:t>
             </a:r>
             <a:endParaRPr lang="en-US" sz="2800" dirty="0"/>
           </a:p>
@@ -6507,32 +7207,47 @@
         <p:spPr>
           <a:xfrm>
             <a:off x="822960" y="2395728"/>
-            <a:ext cx="10545775" cy="1033272"/>
+            <a:ext cx="10545775" cy="795528"/>
           </a:xfrm>
           <a:prstGeom prst="rect">
             <a:avLst/>
           </a:prstGeom>
           <a:solidFill>
-            <a:srgbClr val="F5F6F7"/>
+            <a:srgbClr val="F7F9FC"/>
           </a:solidFill>
-          <a:ln w="9525">
-            <a:solidFill>
-              <a:srgbClr val="D8DBE0"/>
-            </a:solidFill>
-            <a:prstDash val="solid"/>
-          </a:ln>
-        </p:spPr>
-      </p:sp>
-      <p:sp>
-        <p:nvSpPr>
-          <p:cNvPr id="6" name="Text 4"/>
+          <a:ln/>
+        </p:spPr>
+      </p:sp>
+      <p:sp>
+        <p:nvSpPr>
+          <p:cNvPr id="6" name="Shape 4"/>
+          <p:cNvSpPr/>
+          <p:nvPr/>
+        </p:nvSpPr>
+        <p:spPr>
+          <a:xfrm>
+            <a:off x="822960" y="2395728"/>
+            <a:ext cx="50292" cy="795528"/>
+          </a:xfrm>
+          <a:prstGeom prst="rect">
+            <a:avLst/>
+          </a:prstGeom>
+          <a:solidFill>
+            <a:srgbClr val="1F4E9C"/>
+          </a:solidFill>
+          <a:ln/>
+        </p:spPr>
+      </p:sp>
+      <p:sp>
+        <p:nvSpPr>
+          <p:cNvPr id="7" name="Text 5"/>
           <p:cNvSpPr/>
           <p:nvPr/>
         </p:nvSpPr>
         <p:spPr>
           <a:xfrm>
             <a:off x="1078992" y="2505456"/>
-            <a:ext cx="10033711" cy="813816"/>
+            <a:ext cx="10033711" cy="576072"/>
           </a:xfrm>
           <a:prstGeom prst="rect">
             <a:avLst/>
@@ -6559,8 +7274,7 @@
                 <a:ea typeface="Consolas" pitchFamily="34" charset="-122"/>
                 <a:cs typeface="Consolas" pitchFamily="34" charset="-120"/>
               </a:rPr>
-              <a:t>struct Student *p = &amp;stu;   // p指向stu
-printf("%d", (*p).age);     // 先取值再点成员，括号不能丢
+              <a:t>printf("%d", p-&gt;age);    // 等价于 (*p).age
 </a:t>
             </a:r>
             <a:endParaRPr lang="en-US" sz="1400" dirty="0"/>
@@ -6569,13 +7283,13 @@
       </p:sp>
       <p:sp>
         <p:nvSpPr>
-          <p:cNvPr id="7" name="Text 5"/>
-          <p:cNvSpPr/>
-          <p:nvPr/>
-        </p:nvSpPr>
-        <p:spPr>
-          <a:xfrm>
-            <a:off x="896112" y="3630168"/>
+          <p:cNvPr id="8" name="Text 6"/>
+          <p:cNvSpPr/>
+          <p:nvPr/>
+        </p:nvSpPr>
+        <p:spPr>
+          <a:xfrm>
+            <a:off x="896112" y="3392424"/>
             <a:ext cx="10454335" cy="397764"/>
           </a:xfrm>
           <a:prstGeom prst="rect">
@@ -6617,7 +7331,7 @@
                   <a:srgbClr val="000000"/>
                 </a:solidFill>
               </a:rPr>
-              <a:t>指针的老规矩原样适用：&amp;取地址，*取值，p指向stu</a:t>
+              <a:t>p-&gt;age读作p指向的结构体的age，箭头就是"先取值再点成员"的糖</a:t>
             </a:r>
             <a:endParaRPr lang="en-US" sz="1800" dirty="0"/>
           </a:p>
@@ -6625,13 +7339,13 @@
       </p:sp>
       <p:sp>
         <p:nvSpPr>
-          <p:cNvPr id="8" name="Text 6"/>
-          <p:cNvSpPr/>
-          <p:nvPr/>
-        </p:nvSpPr>
-        <p:spPr>
-          <a:xfrm>
-            <a:off x="896112" y="4101084"/>
+          <p:cNvPr id="9" name="Text 7"/>
+          <p:cNvSpPr/>
+          <p:nvPr/>
+        </p:nvSpPr>
+        <p:spPr>
+          <a:xfrm>
+            <a:off x="896112" y="3863340"/>
             <a:ext cx="10454335" cy="397764"/>
           </a:xfrm>
           <a:prstGeom prst="rect">
@@ -6673,8 +7387,33 @@
                   <a:srgbClr val="000000"/>
                 </a:solidFill>
               </a:rPr>
-              <a:t>(*p).age：先顺着p拿到stu，再取age；</a:t>
-            </a:r>
+              <a:t>三种写法一个意思：stu.age、(*p).age、p-&gt;age</a:t>
+            </a:r>
+            <a:endParaRPr lang="en-US" sz="1800" dirty="0"/>
+          </a:p>
+        </p:txBody>
+      </p:sp>
+      <p:sp>
+        <p:nvSpPr>
+          <p:cNvPr id="10" name="Text 8"/>
+          <p:cNvSpPr/>
+          <p:nvPr/>
+        </p:nvSpPr>
+        <p:spPr>
+          <a:xfrm>
+            <a:off x="896112" y="4334256"/>
+            <a:ext cx="10454335" cy="397764"/>
+          </a:xfrm>
+          <a:prstGeom prst="rect">
+            <a:avLst/>
+          </a:prstGeom>
+          <a:noFill/>
+          <a:ln/>
+        </p:spPr>
+        <p:txBody>
+          <a:bodyPr wrap="square" rtlCol="0" anchor="t"/>
+          <a:lstStyle/>
+          <a:p>
             <a:pPr algn="l" indent="0" marL="0">
               <a:lnSpc>
                 <a:spcPct val="115000"/>
@@ -6684,80 +7423,27 @@
             <a:r>
               <a:rPr lang="en-US" sz="1800" b="1" dirty="0">
                 <a:solidFill>
+                  <a:srgbClr val="1F4E9C"/>
+                </a:solidFill>
+                <a:latin typeface="微软雅黑" pitchFamily="34" charset="0"/>
+                <a:ea typeface="微软雅黑" pitchFamily="34" charset="-122"/>
+                <a:cs typeface="微软雅黑" pitchFamily="34" charset="-120"/>
+              </a:rPr>
+              <a:t>•  </a:t>
+            </a:r>
+            <a:pPr algn="l" indent="0" marL="0">
+              <a:lnSpc>
+                <a:spcPct val="115000"/>
+              </a:lnSpc>
+              <a:buNone/>
+            </a:pPr>
+            <a:r>
+              <a:rPr lang="en-US" sz="1800" dirty="0">
+                <a:solidFill>
                   <a:srgbClr val="000000"/>
                 </a:solidFill>
               </a:rPr>
-              <a:t>括号必须写</a:t>
-            </a:r>
-            <a:pPr algn="l" indent="0" marL="0">
-              <a:lnSpc>
-                <a:spcPct val="115000"/>
-              </a:lnSpc>
-              <a:buNone/>
-            </a:pPr>
-            <a:r>
-              <a:rPr lang="en-US" sz="1800" dirty="0">
-                <a:solidFill>
-                  <a:srgbClr val="000000"/>
-                </a:solidFill>
-              </a:rPr>
-              <a:t>，点号优先级更高</a:t>
-            </a:r>
-            <a:endParaRPr lang="en-US" sz="1800" dirty="0"/>
-          </a:p>
-        </p:txBody>
-      </p:sp>
-      <p:sp>
-        <p:nvSpPr>
-          <p:cNvPr id="9" name="Text 7"/>
-          <p:cNvSpPr/>
-          <p:nvPr/>
-        </p:nvSpPr>
-        <p:spPr>
-          <a:xfrm>
-            <a:off x="896112" y="4572000"/>
-            <a:ext cx="10454335" cy="397764"/>
-          </a:xfrm>
-          <a:prstGeom prst="rect">
-            <a:avLst/>
-          </a:prstGeom>
-          <a:noFill/>
-          <a:ln/>
-        </p:spPr>
-        <p:txBody>
-          <a:bodyPr wrap="square" rtlCol="0" anchor="t"/>
-          <a:lstStyle/>
-          <a:p>
-            <a:pPr algn="l" indent="0" marL="0">
-              <a:lnSpc>
-                <a:spcPct val="115000"/>
-              </a:lnSpc>
-              <a:buNone/>
-            </a:pPr>
-            <a:r>
-              <a:rPr lang="en-US" sz="1800" b="1" dirty="0">
-                <a:solidFill>
-                  <a:srgbClr val="1F4E9C"/>
-                </a:solidFill>
-                <a:latin typeface="微软雅黑" pitchFamily="34" charset="0"/>
-                <a:ea typeface="微软雅黑" pitchFamily="34" charset="-122"/>
-                <a:cs typeface="微软雅黑" pitchFamily="34" charset="-120"/>
-              </a:rPr>
-              <a:t>•  </a:t>
-            </a:r>
-            <a:pPr algn="l" indent="0" marL="0">
-              <a:lnSpc>
-                <a:spcPct val="115000"/>
-              </a:lnSpc>
-              <a:buNone/>
-            </a:pPr>
-            <a:r>
-              <a:rPr lang="en-US" sz="1800" dirty="0">
-                <a:solidFill>
-                  <a:srgbClr val="000000"/>
-                </a:solidFill>
-              </a:rPr>
-              <a:t>这套写法能用，但每次带括号太啰嗦，下一页给你简写</a:t>
+              <a:t>代码里箭头出现频率极高，看到箭头先翻译成格子上的箭头</a:t>
             </a:r>
             <a:endParaRPr lang="en-US" sz="1800" dirty="0"/>
           </a:p>
@@ -6835,7 +7521,7 @@
                 <a:ea typeface="微软雅黑" pitchFamily="34" charset="-122"/>
                 <a:cs typeface="微软雅黑" pitchFamily="34" charset="-120"/>
               </a:rPr>
-              <a:t>9 / 14</a:t>
+              <a:t>9 / 15</a:t>
             </a:r>
             <a:endParaRPr lang="en-US" sz="1000" dirty="0"/>
           </a:p>
@@ -6874,7 +7560,7 @@
                 <a:ea typeface="微软雅黑" pitchFamily="34" charset="-122"/>
                 <a:cs typeface="微软雅黑" pitchFamily="34" charset="-120"/>
               </a:rPr>
-              <a:t>箭头写法</a:t>
+              <a:t>typedef</a:t>
             </a:r>
             <a:endParaRPr lang="en-US" sz="1400" dirty="0"/>
           </a:p>
@@ -6913,7 +7599,7 @@
                 <a:ea typeface="微软雅黑" pitchFamily="34" charset="-122"/>
                 <a:cs typeface="微软雅黑" pitchFamily="34" charset="-120"/>
               </a:rPr>
-              <a:t>p-&gt;age：箭头是括号点号的简写</a:t>
+              <a:t>typedef：给类型起别名</a:t>
             </a:r>
             <a:endParaRPr lang="en-US" sz="2800" dirty="0"/>
           </a:p>
@@ -6928,32 +7614,47 @@
         <p:spPr>
           <a:xfrm>
             <a:off x="822960" y="2395728"/>
-            <a:ext cx="10545775" cy="795528"/>
+            <a:ext cx="10545775" cy="1033272"/>
           </a:xfrm>
           <a:prstGeom prst="rect">
             <a:avLst/>
           </a:prstGeom>
           <a:solidFill>
-            <a:srgbClr val="F5F6F7"/>
+            <a:srgbClr val="F7F9FC"/>
           </a:solidFill>
-          <a:ln w="9525">
-            <a:solidFill>
-              <a:srgbClr val="D8DBE0"/>
-            </a:solidFill>
-            <a:prstDash val="solid"/>
-          </a:ln>
-        </p:spPr>
-      </p:sp>
-      <p:sp>
-        <p:nvSpPr>
-          <p:cNvPr id="6" name="Text 4"/>
+          <a:ln/>
+        </p:spPr>
+      </p:sp>
+      <p:sp>
+        <p:nvSpPr>
+          <p:cNvPr id="6" name="Shape 4"/>
+          <p:cNvSpPr/>
+          <p:nvPr/>
+        </p:nvSpPr>
+        <p:spPr>
+          <a:xfrm>
+            <a:off x="822960" y="2395728"/>
+            <a:ext cx="50292" cy="1033272"/>
+          </a:xfrm>
+          <a:prstGeom prst="rect">
+            <a:avLst/>
+          </a:prstGeom>
+          <a:solidFill>
+            <a:srgbClr val="1F4E9C"/>
+          </a:solidFill>
+          <a:ln/>
+        </p:spPr>
+      </p:sp>
+      <p:sp>
+        <p:nvSpPr>
+          <p:cNvPr id="7" name="Text 5"/>
           <p:cNvSpPr/>
           <p:nvPr/>
         </p:nvSpPr>
         <p:spPr>
           <a:xfrm>
             <a:off x="1078992" y="2505456"/>
-            <a:ext cx="10033711" cy="576072"/>
+            <a:ext cx="10033711" cy="813816"/>
           </a:xfrm>
           <a:prstGeom prst="rect">
             <a:avLst/>
@@ -6980,7 +7681,8 @@
                 <a:ea typeface="Consolas" pitchFamily="34" charset="-122"/>
                 <a:cs typeface="Consolas" pitchFamily="34" charset="-120"/>
               </a:rPr>
-              <a:t>printf("%d", p-&gt;age);    // 等价于 (*p).age
+              <a:t>typedef struct Student Stu;
+Stu stu2 = {21, 90.0};     // Stu就是struct Student的别名
 </a:t>
             </a:r>
             <a:endParaRPr lang="en-US" sz="1400" dirty="0"/>
@@ -6989,13 +7691,13 @@
       </p:sp>
       <p:sp>
         <p:nvSpPr>
-          <p:cNvPr id="7" name="Text 5"/>
-          <p:cNvSpPr/>
-          <p:nvPr/>
-        </p:nvSpPr>
-        <p:spPr>
-          <a:xfrm>
-            <a:off x="896112" y="3392424"/>
+          <p:cNvPr id="8" name="Text 6"/>
+          <p:cNvSpPr/>
+          <p:nvPr/>
+        </p:nvSpPr>
+        <p:spPr>
+          <a:xfrm>
+            <a:off x="896112" y="3630168"/>
             <a:ext cx="10454335" cy="397764"/>
           </a:xfrm>
           <a:prstGeom prst="rect">
@@ -7037,7 +7739,7 @@
                   <a:srgbClr val="000000"/>
                 </a:solidFill>
               </a:rPr>
-              <a:t>p-&gt;age读作p指向的结构体的age，箭头就是"先取值再点成员"的糖</a:t>
+              <a:t>typedef给现有类型起个短名字，之后用别名声明变量</a:t>
             </a:r>
             <a:endParaRPr lang="en-US" sz="1800" dirty="0"/>
           </a:p>
@@ -7045,13 +7747,13 @@
       </p:sp>
       <p:sp>
         <p:nvSpPr>
-          <p:cNvPr id="8" name="Text 6"/>
-          <p:cNvSpPr/>
-          <p:nvPr/>
-        </p:nvSpPr>
-        <p:spPr>
-          <a:xfrm>
-            <a:off x="896112" y="3863340"/>
+          <p:cNvPr id="9" name="Text 7"/>
+          <p:cNvSpPr/>
+          <p:nvPr/>
+        </p:nvSpPr>
+        <p:spPr>
+          <a:xfrm>
+            <a:off x="896112" y="4101084"/>
             <a:ext cx="10454335" cy="397764"/>
           </a:xfrm>
           <a:prstGeom prst="rect">
@@ -7093,7 +7795,7 @@
                   <a:srgbClr val="000000"/>
                 </a:solidFill>
               </a:rPr>
-              <a:t>三种写法一个意思：stu.age、(*p).age、p-&gt;age</a:t>
+              <a:t>结构体名带着struct前缀写起来长，别名让声明变干净</a:t>
             </a:r>
             <a:endParaRPr lang="en-US" sz="1800" dirty="0"/>
           </a:p>
@@ -7101,13 +7803,13 @@
       </p:sp>
       <p:sp>
         <p:nvSpPr>
-          <p:cNvPr id="9" name="Text 7"/>
-          <p:cNvSpPr/>
-          <p:nvPr/>
-        </p:nvSpPr>
-        <p:spPr>
-          <a:xfrm>
-            <a:off x="896112" y="4334256"/>
+          <p:cNvPr id="10" name="Text 8"/>
+          <p:cNvSpPr/>
+          <p:nvPr/>
+        </p:nvSpPr>
+        <p:spPr>
+          <a:xfrm>
+            <a:off x="896112" y="4572000"/>
             <a:ext cx="10454335" cy="397764"/>
           </a:xfrm>
           <a:prstGeom prst="rect">
@@ -7149,7 +7851,7 @@
                   <a:srgbClr val="000000"/>
                 </a:solidFill>
               </a:rPr>
-              <a:t>代码里箭头出现频率极高，看到箭头先翻译成格子上的箭头</a:t>
+              <a:t>别名和原名完全等价，用哪个编译器都认</a:t>
             </a:r>
             <a:endParaRPr lang="en-US" sz="1800" dirty="0"/>
           </a:p>
